--- a/slides/Lesson 1 - Setup and Your First AI Call.pptx
+++ b/slides/Lesson 1 - Setup and Your First AI Call.pptx
@@ -16,6 +16,8 @@
     <p:sldId id="261" r:id="rId7"/>
     <p:sldId id="262" r:id="rId6"/>
     <p:sldId id="263" r:id="rId28"/>
+    <p:sldId id="264" r:id="rId29"/>
+    <p:sldId id="265" r:id="rId30"/>
   </p:sldIdLst>
   <p:sldSz cy="10287000" cx="18288000"/>
   <p:notesSz cx="6858000" cy="9144000"/>
@@ -8602,6 +8604,209 @@
 </p:sld>
 </file>
 
+<file path=ppt/slides/slide10.xml><?xml version="1.0" encoding="utf-8"?>
+<p:sld xmlns:a="http://schemas.openxmlformats.org/drawingml/2006/main" xmlns:p="http://schemas.openxmlformats.org/presentationml/2006/main" xmlns:r="http://schemas.openxmlformats.org/officeDocument/2006/relationships">
+  <p:cSld>
+    <p:spTree>
+      <p:nvGrpSpPr>
+        <p:cNvPr id="1" name=""/>
+        <p:cNvGrpSpPr/>
+        <p:nvPr/>
+      </p:nvGrpSpPr>
+      <p:grpSpPr/>
+      <p:sp>
+        <p:nvSpPr>
+          <p:cNvPr id="2" name="Rectangle 1"/>
+          <p:cNvSpPr/>
+          <p:nvPr/>
+        </p:nvSpPr>
+        <p:spPr>
+          <a:xfrm>
+            <a:off x="9144000" y="0"/>
+            <a:ext cx="9144000" cy="10287000"/>
+          </a:xfrm>
+          <a:prstGeom prst="rect">
+            <a:avLst/>
+          </a:prstGeom>
+          <a:solidFill>
+            <a:srgbClr val="F3F3F3"/>
+          </a:solidFill>
+          <a:ln>
+            <a:noFill/>
+          </a:ln>
+          <a:effectLst/>
+        </p:spPr>
+        <p:style>
+          <a:lnRef idx="1">
+            <a:schemeClr val="accent1"/>
+          </a:lnRef>
+          <a:fillRef idx="3">
+            <a:schemeClr val="accent1"/>
+          </a:fillRef>
+          <a:effectRef idx="2">
+            <a:schemeClr val="accent1"/>
+          </a:effectRef>
+          <a:fontRef idx="minor">
+            <a:schemeClr val="lt1"/>
+          </a:fontRef>
+        </p:style>
+        <p:txBody>
+          <a:bodyPr rtlCol="0" anchor="ctr"/>
+          <a:lstStyle/>
+          <a:p>
+            <a:pPr algn="ctr"/>
+          </a:p>
+        </p:txBody>
+      </p:sp>
+      <p:sp>
+        <p:nvSpPr>
+          <p:cNvPr id="3" name="TextBox 2"/>
+          <p:cNvSpPr txBox="1"/>
+          <p:nvPr/>
+        </p:nvSpPr>
+        <p:spPr>
+          <a:xfrm>
+            <a:off x="1069848" y="3849624"/>
+            <a:ext cx="5961888" cy="548640"/>
+          </a:xfrm>
+          <a:prstGeom prst="rect">
+            <a:avLst/>
+          </a:prstGeom>
+          <a:noFill/>
+        </p:spPr>
+        <p:txBody>
+          <a:bodyPr wrap="square">
+            <a:spAutoFit/>
+          </a:bodyPr>
+          <a:lstStyle/>
+          <a:p>
+            <a:pPr algn="l"/>
+            <a:r>
+              <a:rPr sz="3100">
+                <a:solidFill>
+                  <a:srgbClr val="666666"/>
+                </a:solidFill>
+                <a:latin typeface="Poppins Medium"/>
+              </a:rPr>
+              <a:t>Homework</a:t>
+            </a:r>
+          </a:p>
+        </p:txBody>
+      </p:sp>
+      <p:sp>
+        <p:nvSpPr>
+          <p:cNvPr id="4" name="TextBox 3"/>
+          <p:cNvSpPr txBox="1"/>
+          <p:nvPr/>
+        </p:nvSpPr>
+        <p:spPr>
+          <a:xfrm>
+            <a:off x="1069848" y="4572000"/>
+            <a:ext cx="7754112" cy="1828800"/>
+          </a:xfrm>
+          <a:prstGeom prst="rect">
+            <a:avLst/>
+          </a:prstGeom>
+          <a:noFill/>
+        </p:spPr>
+        <p:txBody>
+          <a:bodyPr wrap="square">
+            <a:spAutoFit/>
+          </a:bodyPr>
+          <a:lstStyle/>
+          <a:p>
+            <a:pPr algn="l"/>
+            <a:r>
+              <a:rPr sz="5000">
+                <a:solidFill>
+                  <a:srgbClr val="3627FC"/>
+                </a:solidFill>
+                <a:latin typeface="Poppins ExtraBold"/>
+              </a:rPr>
+              <a:t>Bring your own notes</a:t>
+            </a:r>
+          </a:p>
+        </p:txBody>
+      </p:sp>
+      <p:sp>
+        <p:nvSpPr>
+          <p:cNvPr id="5" name="TextBox 4"/>
+          <p:cNvSpPr txBox="1"/>
+          <p:nvPr/>
+        </p:nvSpPr>
+        <p:spPr>
+          <a:xfrm>
+            <a:off x="9985248" y="3108960"/>
+            <a:ext cx="7242048" cy="4572000"/>
+          </a:xfrm>
+          <a:prstGeom prst="rect">
+            <a:avLst/>
+          </a:prstGeom>
+          <a:noFill/>
+        </p:spPr>
+        <p:txBody>
+          <a:bodyPr wrap="square">
+            <a:spAutoFit/>
+          </a:bodyPr>
+          <a:lstStyle/>
+          <a:p>
+            <a:pPr algn="l">
+              <a:spcAft>
+                <a:spcPts val="1600"/>
+              </a:spcAft>
+            </a:pPr>
+            <a:r>
+              <a:rPr sz="1800">
+                <a:solidFill>
+                  <a:srgbClr val="3627FC"/>
+                </a:solidFill>
+                <a:latin typeface="Poppins SemiBold"/>
+              </a:rPr>
+              <a:t>3 to 10 of your own .txt or .md files.</a:t>
+            </a:r>
+          </a:p>
+          <a:p>
+            <a:pPr algn="l">
+              <a:spcAft>
+                <a:spcPts val="1600"/>
+              </a:spcAft>
+            </a:pPr>
+            <a:r>
+              <a:rPr sz="1800">
+                <a:solidFill>
+                  <a:srgbClr val="3627FC"/>
+                </a:solidFill>
+                <a:latin typeface="Poppins SemiBold"/>
+              </a:rPr>
+              <a:t>Revision notes, a subject you study, the rules of a game you play, a wiki you exported. Armenian, English or both.</a:t>
+            </a:r>
+          </a:p>
+          <a:p>
+            <a:pPr algn="l">
+              <a:spcAft>
+                <a:spcPts val="1600"/>
+              </a:spcAft>
+            </a:pPr>
+            <a:r>
+              <a:rPr sz="1800">
+                <a:solidFill>
+                  <a:srgbClr val="3627FC"/>
+                </a:solidFill>
+                <a:latin typeface="Poppins SemiBold"/>
+              </a:rPr>
+              <a:t>Shared storage is visible to everyone - bring notes on a general subject, and keep personal things out of the workshop folder.</a:t>
+            </a:r>
+          </a:p>
+        </p:txBody>
+      </p:sp>
+    </p:spTree>
+  </p:cSld>
+  <p:clrMapOvr>
+    <a:masterClrMapping/>
+  </p:clrMapOvr>
+</p:sld>
+</file>
+
 <file path=ppt/slides/slide2.xml><?xml version="1.0" encoding="utf-8"?>
 <p:sld xmlns:a="http://schemas.openxmlformats.org/drawingml/2006/main" xmlns:p="http://schemas.openxmlformats.org/presentationml/2006/main" xmlns:r="http://schemas.openxmlformats.org/officeDocument/2006/relationships">
   <p:cSld>
@@ -8702,14 +8907,49 @@
       <p:grpSpPr/>
       <p:sp>
         <p:nvSpPr>
-          <p:cNvPr id="2" name="Rectangle 1"/>
+          <p:cNvPr id="2" name="TextBox 1"/>
+          <p:cNvSpPr txBox="1"/>
+          <p:nvPr/>
+        </p:nvSpPr>
+        <p:spPr>
+          <a:xfrm>
+            <a:off x="1069848" y="822960"/>
+            <a:ext cx="14630400" cy="914400"/>
+          </a:xfrm>
+          <a:prstGeom prst="rect">
+            <a:avLst/>
+          </a:prstGeom>
+          <a:noFill/>
+        </p:spPr>
+        <p:txBody>
+          <a:bodyPr wrap="square">
+            <a:spAutoFit/>
+          </a:bodyPr>
+          <a:lstStyle/>
+          <a:p>
+            <a:pPr algn="l"/>
+            <a:r>
+              <a:rPr sz="5000">
+                <a:solidFill>
+                  <a:srgbClr val="3627FC"/>
+                </a:solidFill>
+                <a:latin typeface="Poppins ExtraBold"/>
+              </a:rPr>
+              <a:t>Where we are going</a:t>
+            </a:r>
+          </a:p>
+        </p:txBody>
+      </p:sp>
+      <p:sp>
+        <p:nvSpPr>
+          <p:cNvPr id="3" name="Rectangle 2"/>
           <p:cNvSpPr/>
           <p:nvPr/>
         </p:nvSpPr>
         <p:spPr>
           <a:xfrm>
-            <a:off x="9144000" y="0"/>
-            <a:ext cx="9144000" cy="10287000"/>
+            <a:off x="960119" y="3154679"/>
+            <a:ext cx="10019211" cy="566928"/>
           </a:xfrm>
           <a:prstGeom prst="rect">
             <a:avLst/>
@@ -8746,14 +8986,14 @@
       </p:sp>
       <p:sp>
         <p:nvSpPr>
-          <p:cNvPr id="3" name="TextBox 2"/>
+          <p:cNvPr id="4" name="TextBox 3"/>
           <p:cNvSpPr txBox="1"/>
           <p:nvPr/>
         </p:nvSpPr>
         <p:spPr>
           <a:xfrm>
-            <a:off x="1069848" y="2788920"/>
-            <a:ext cx="7754112" cy="1097280"/>
+            <a:off x="960119" y="3218687"/>
+            <a:ext cx="10019211" cy="457200"/>
           </a:xfrm>
           <a:prstGeom prst="rect">
             <a:avLst/>
@@ -8766,29 +9006,73 @@
           </a:bodyPr>
           <a:lstStyle/>
           <a:p>
-            <a:pPr algn="l"/>
+            <a:pPr algn="ctr"/>
             <a:r>
-              <a:rPr sz="5000">
-                <a:solidFill>
-                  <a:srgbClr val="3627FC"/>
-                </a:solidFill>
-                <a:latin typeface="Poppins ExtraBold"/>
+              <a:rPr sz="1600">
+                <a:solidFill>
+                  <a:srgbClr val="666666"/>
+                </a:solidFill>
+                <a:latin typeface="Poppins Medium"/>
               </a:rPr>
-              <a:t>Workshop Overview</a:t>
+              <a:t>EXPLORE</a:t>
             </a:r>
           </a:p>
         </p:txBody>
       </p:sp>
       <p:sp>
         <p:nvSpPr>
-          <p:cNvPr id="4" name="TextBox 3"/>
+          <p:cNvPr id="5" name="Rectangle 4"/>
+          <p:cNvSpPr/>
+          <p:nvPr/>
+        </p:nvSpPr>
+        <p:spPr>
+          <a:xfrm>
+            <a:off x="11541034" y="3154679"/>
+            <a:ext cx="1554480" cy="566928"/>
+          </a:xfrm>
+          <a:prstGeom prst="rect">
+            <a:avLst/>
+          </a:prstGeom>
+          <a:solidFill>
+            <a:srgbClr val="F3F3F3"/>
+          </a:solidFill>
+          <a:ln>
+            <a:noFill/>
+          </a:ln>
+          <a:effectLst/>
+        </p:spPr>
+        <p:style>
+          <a:lnRef idx="1">
+            <a:schemeClr val="accent1"/>
+          </a:lnRef>
+          <a:fillRef idx="3">
+            <a:schemeClr val="accent1"/>
+          </a:fillRef>
+          <a:effectRef idx="2">
+            <a:schemeClr val="accent1"/>
+          </a:effectRef>
+          <a:fontRef idx="minor">
+            <a:schemeClr val="lt1"/>
+          </a:fontRef>
+        </p:style>
+        <p:txBody>
+          <a:bodyPr rtlCol="0" anchor="ctr"/>
+          <a:lstStyle/>
+          <a:p>
+            <a:pPr algn="ctr"/>
+          </a:p>
+        </p:txBody>
+      </p:sp>
+      <p:sp>
+        <p:nvSpPr>
+          <p:cNvPr id="6" name="TextBox 5"/>
           <p:cNvSpPr txBox="1"/>
           <p:nvPr/>
         </p:nvSpPr>
         <p:spPr>
           <a:xfrm>
-            <a:off x="9985248" y="2633472"/>
-            <a:ext cx="7242048" cy="5029200"/>
+            <a:off x="11541034" y="3218687"/>
+            <a:ext cx="1554480" cy="457200"/>
           </a:xfrm>
           <a:prstGeom prst="rect">
             <a:avLst/>
@@ -8801,51 +9085,1381 @@
           </a:bodyPr>
           <a:lstStyle/>
           <a:p>
-            <a:pPr algn="l">
-              <a:spcAft>
-                <a:spcPts val="1400"/>
-              </a:spcAft>
-            </a:pPr>
+            <a:pPr algn="ctr"/>
             <a:r>
-              <a:rPr sz="1800">
+              <a:rPr sz="1600">
+                <a:solidFill>
+                  <a:srgbClr val="666666"/>
+                </a:solidFill>
+                <a:latin typeface="Poppins Medium"/>
+              </a:rPr>
+              <a:t>BUILD</a:t>
+            </a:r>
+          </a:p>
+        </p:txBody>
+      </p:sp>
+      <p:sp>
+        <p:nvSpPr>
+          <p:cNvPr id="7" name="Rectangle 6"/>
+          <p:cNvSpPr/>
+          <p:nvPr/>
+        </p:nvSpPr>
+        <p:spPr>
+          <a:xfrm>
+            <a:off x="13657217" y="3154679"/>
+            <a:ext cx="3670662" cy="566928"/>
+          </a:xfrm>
+          <a:prstGeom prst="rect">
+            <a:avLst/>
+          </a:prstGeom>
+          <a:solidFill>
+            <a:srgbClr val="F3F3F3"/>
+          </a:solidFill>
+          <a:ln>
+            <a:noFill/>
+          </a:ln>
+          <a:effectLst/>
+        </p:spPr>
+        <p:style>
+          <a:lnRef idx="1">
+            <a:schemeClr val="accent1"/>
+          </a:lnRef>
+          <a:fillRef idx="3">
+            <a:schemeClr val="accent1"/>
+          </a:fillRef>
+          <a:effectRef idx="2">
+            <a:schemeClr val="accent1"/>
+          </a:effectRef>
+          <a:fontRef idx="minor">
+            <a:schemeClr val="lt1"/>
+          </a:fontRef>
+        </p:style>
+        <p:txBody>
+          <a:bodyPr rtlCol="0" anchor="ctr"/>
+          <a:lstStyle/>
+          <a:p>
+            <a:pPr algn="ctr"/>
+          </a:p>
+        </p:txBody>
+      </p:sp>
+      <p:sp>
+        <p:nvSpPr>
+          <p:cNvPr id="8" name="TextBox 7"/>
+          <p:cNvSpPr txBox="1"/>
+          <p:nvPr/>
+        </p:nvSpPr>
+        <p:spPr>
+          <a:xfrm>
+            <a:off x="13657217" y="3218687"/>
+            <a:ext cx="3670662" cy="457200"/>
+          </a:xfrm>
+          <a:prstGeom prst="rect">
+            <a:avLst/>
+          </a:prstGeom>
+          <a:noFill/>
+        </p:spPr>
+        <p:txBody>
+          <a:bodyPr wrap="square">
+            <a:spAutoFit/>
+          </a:bodyPr>
+          <a:lstStyle/>
+          <a:p>
+            <a:pPr algn="ctr"/>
+            <a:r>
+              <a:rPr sz="1600">
+                <a:solidFill>
+                  <a:srgbClr val="666666"/>
+                </a:solidFill>
+                <a:latin typeface="Poppins Medium"/>
+              </a:rPr>
+              <a:t>FINISH</a:t>
+            </a:r>
+          </a:p>
+        </p:txBody>
+      </p:sp>
+      <p:sp>
+        <p:nvSpPr>
+          <p:cNvPr id="9" name="Rectangle 8"/>
+          <p:cNvSpPr/>
+          <p:nvPr/>
+        </p:nvSpPr>
+        <p:spPr>
+          <a:xfrm>
+            <a:off x="1737360" y="5093207"/>
+            <a:ext cx="14813280" cy="54864"/>
+          </a:xfrm>
+          <a:prstGeom prst="rect">
+            <a:avLst/>
+          </a:prstGeom>
+          <a:solidFill>
+            <a:srgbClr val="F3F3F3"/>
+          </a:solidFill>
+          <a:ln>
+            <a:noFill/>
+          </a:ln>
+          <a:effectLst/>
+        </p:spPr>
+        <p:style>
+          <a:lnRef idx="1">
+            <a:schemeClr val="accent1"/>
+          </a:lnRef>
+          <a:fillRef idx="3">
+            <a:schemeClr val="accent1"/>
+          </a:fillRef>
+          <a:effectRef idx="2">
+            <a:schemeClr val="accent1"/>
+          </a:effectRef>
+          <a:fontRef idx="minor">
+            <a:schemeClr val="lt1"/>
+          </a:fontRef>
+        </p:style>
+        <p:txBody>
+          <a:bodyPr rtlCol="0" anchor="ctr"/>
+          <a:lstStyle/>
+          <a:p>
+            <a:pPr algn="ctr"/>
+          </a:p>
+        </p:txBody>
+      </p:sp>
+      <p:sp>
+        <p:nvSpPr>
+          <p:cNvPr id="10" name="Oval 9"/>
+          <p:cNvSpPr/>
+          <p:nvPr/>
+        </p:nvSpPr>
+        <p:spPr>
+          <a:xfrm>
+            <a:off x="1371600" y="4754879"/>
+            <a:ext cx="731520" cy="731520"/>
+          </a:xfrm>
+          <a:prstGeom prst="ellipse">
+            <a:avLst/>
+          </a:prstGeom>
+          <a:solidFill>
+            <a:srgbClr val="FFFFFF"/>
+          </a:solidFill>
+          <a:ln w="25400">
+            <a:solidFill>
+              <a:srgbClr val="F3F3F3"/>
+            </a:solidFill>
+          </a:ln>
+          <a:effectLst/>
+        </p:spPr>
+        <p:style>
+          <a:lnRef idx="1">
+            <a:schemeClr val="accent1"/>
+          </a:lnRef>
+          <a:fillRef idx="3">
+            <a:schemeClr val="accent1"/>
+          </a:fillRef>
+          <a:effectRef idx="2">
+            <a:schemeClr val="accent1"/>
+          </a:effectRef>
+          <a:fontRef idx="minor">
+            <a:schemeClr val="lt1"/>
+          </a:fontRef>
+        </p:style>
+        <p:txBody>
+          <a:bodyPr rtlCol="0" anchor="ctr"/>
+          <a:lstStyle/>
+          <a:p>
+            <a:pPr algn="ctr"/>
+          </a:p>
+        </p:txBody>
+      </p:sp>
+      <p:sp>
+        <p:nvSpPr>
+          <p:cNvPr id="11" name="TextBox 10"/>
+          <p:cNvSpPr txBox="1"/>
+          <p:nvPr/>
+        </p:nvSpPr>
+        <p:spPr>
+          <a:xfrm>
+            <a:off x="1280160" y="4864607"/>
+            <a:ext cx="914400" cy="457200"/>
+          </a:xfrm>
+          <a:prstGeom prst="rect">
+            <a:avLst/>
+          </a:prstGeom>
+          <a:noFill/>
+        </p:spPr>
+        <p:txBody>
+          <a:bodyPr wrap="square">
+            <a:spAutoFit/>
+          </a:bodyPr>
+          <a:lstStyle/>
+          <a:p>
+            <a:pPr algn="ctr"/>
+            <a:r>
+              <a:rPr sz="2400">
+                <a:solidFill>
+                  <a:srgbClr val="666666"/>
+                </a:solidFill>
+                <a:latin typeface="Poppins ExtraBold"/>
+              </a:rPr>
+              <a:t>1</a:t>
+            </a:r>
+          </a:p>
+        </p:txBody>
+      </p:sp>
+      <p:sp>
+        <p:nvSpPr>
+          <p:cNvPr id="12" name="TextBox 11"/>
+          <p:cNvSpPr txBox="1"/>
+          <p:nvPr/>
+        </p:nvSpPr>
+        <p:spPr>
+          <a:xfrm>
+            <a:off x="685800" y="3886200"/>
+            <a:ext cx="2103120" cy="457200"/>
+          </a:xfrm>
+          <a:prstGeom prst="rect">
+            <a:avLst/>
+          </a:prstGeom>
+          <a:noFill/>
+        </p:spPr>
+        <p:txBody>
+          <a:bodyPr wrap="square">
+            <a:spAutoFit/>
+          </a:bodyPr>
+          <a:lstStyle/>
+          <a:p>
+            <a:pPr algn="ctr"/>
+            <a:r>
+              <a:rPr sz="1900">
+                <a:solidFill>
+                  <a:srgbClr val="434343"/>
+                </a:solidFill>
+                <a:latin typeface="Poppins ExtraBold"/>
+              </a:rPr>
+              <a:t>Setup</a:t>
+            </a:r>
+          </a:p>
+        </p:txBody>
+      </p:sp>
+      <p:sp>
+        <p:nvSpPr>
+          <p:cNvPr id="13" name="TextBox 12"/>
+          <p:cNvSpPr txBox="1"/>
+          <p:nvPr/>
+        </p:nvSpPr>
+        <p:spPr>
+          <a:xfrm>
+            <a:off x="502919" y="4251959"/>
+            <a:ext cx="2468880" cy="822960"/>
+          </a:xfrm>
+          <a:prstGeom prst="rect">
+            <a:avLst/>
+          </a:prstGeom>
+          <a:noFill/>
+        </p:spPr>
+        <p:txBody>
+          <a:bodyPr wrap="square">
+            <a:spAutoFit/>
+          </a:bodyPr>
+          <a:lstStyle/>
+          <a:p>
+            <a:pPr algn="ctr"/>
+            <a:r>
+              <a:rPr sz="1200">
                 <a:solidFill>
                   <a:srgbClr val="666666"/>
                 </a:solidFill>
                 <a:latin typeface="Poppins"/>
               </a:rPr>
-              <a:t>Ask a chatbot about your homework and it answers confidently - and sometimes invents the answer completely. It has never seen your notes.</a:t>
+              <a:t>Your first AI call, and system prompts</a:t>
             </a:r>
           </a:p>
+        </p:txBody>
+      </p:sp>
+      <p:sp>
+        <p:nvSpPr>
+          <p:cNvPr id="14" name="Oval 13"/>
+          <p:cNvSpPr/>
+          <p:nvPr/>
+        </p:nvSpPr>
+        <p:spPr>
+          <a:xfrm>
+            <a:off x="3487782" y="4754879"/>
+            <a:ext cx="731520" cy="731520"/>
+          </a:xfrm>
+          <a:prstGeom prst="ellipse">
+            <a:avLst/>
+          </a:prstGeom>
+          <a:solidFill>
+            <a:srgbClr val="FFFFFF"/>
+          </a:solidFill>
+          <a:ln w="25400">
+            <a:solidFill>
+              <a:srgbClr val="F3F3F3"/>
+            </a:solidFill>
+          </a:ln>
+          <a:effectLst/>
+        </p:spPr>
+        <p:style>
+          <a:lnRef idx="1">
+            <a:schemeClr val="accent1"/>
+          </a:lnRef>
+          <a:fillRef idx="3">
+            <a:schemeClr val="accent1"/>
+          </a:fillRef>
+          <a:effectRef idx="2">
+            <a:schemeClr val="accent1"/>
+          </a:effectRef>
+          <a:fontRef idx="minor">
+            <a:schemeClr val="lt1"/>
+          </a:fontRef>
+        </p:style>
+        <p:txBody>
+          <a:bodyPr rtlCol="0" anchor="ctr"/>
+          <a:lstStyle/>
           <a:p>
-            <a:pPr algn="l">
-              <a:spcAft>
-                <a:spcPts val="1400"/>
-              </a:spcAft>
-            </a:pPr>
+            <a:pPr algn="ctr"/>
+          </a:p>
+        </p:txBody>
+      </p:sp>
+      <p:sp>
+        <p:nvSpPr>
+          <p:cNvPr id="15" name="TextBox 14"/>
+          <p:cNvSpPr txBox="1"/>
+          <p:nvPr/>
+        </p:nvSpPr>
+        <p:spPr>
+          <a:xfrm>
+            <a:off x="3396342" y="4864607"/>
+            <a:ext cx="914400" cy="457200"/>
+          </a:xfrm>
+          <a:prstGeom prst="rect">
+            <a:avLst/>
+          </a:prstGeom>
+          <a:noFill/>
+        </p:spPr>
+        <p:txBody>
+          <a:bodyPr wrap="square">
+            <a:spAutoFit/>
+          </a:bodyPr>
+          <a:lstStyle/>
+          <a:p>
+            <a:pPr algn="ctr"/>
             <a:r>
-              <a:rPr sz="1800">
+              <a:rPr sz="2400">
+                <a:solidFill>
+                  <a:srgbClr val="666666"/>
+                </a:solidFill>
+                <a:latin typeface="Poppins ExtraBold"/>
+              </a:rPr>
+              <a:t>2</a:t>
+            </a:r>
+          </a:p>
+        </p:txBody>
+      </p:sp>
+      <p:sp>
+        <p:nvSpPr>
+          <p:cNvPr id="16" name="TextBox 15"/>
+          <p:cNvSpPr txBox="1"/>
+          <p:nvPr/>
+        </p:nvSpPr>
+        <p:spPr>
+          <a:xfrm>
+            <a:off x="2801982" y="5806440"/>
+            <a:ext cx="2103120" cy="457200"/>
+          </a:xfrm>
+          <a:prstGeom prst="rect">
+            <a:avLst/>
+          </a:prstGeom>
+          <a:noFill/>
+        </p:spPr>
+        <p:txBody>
+          <a:bodyPr wrap="square">
+            <a:spAutoFit/>
+          </a:bodyPr>
+          <a:lstStyle/>
+          <a:p>
+            <a:pPr algn="ctr"/>
+            <a:r>
+              <a:rPr sz="1900">
+                <a:solidFill>
+                  <a:srgbClr val="434343"/>
+                </a:solidFill>
+                <a:latin typeface="Poppins ExtraBold"/>
+              </a:rPr>
+              <a:t>Why AI lies</a:t>
+            </a:r>
+          </a:p>
+        </p:txBody>
+      </p:sp>
+      <p:sp>
+        <p:nvSpPr>
+          <p:cNvPr id="17" name="TextBox 16"/>
+          <p:cNvSpPr txBox="1"/>
+          <p:nvPr/>
+        </p:nvSpPr>
+        <p:spPr>
+          <a:xfrm>
+            <a:off x="2619102" y="6217920"/>
+            <a:ext cx="2468880" cy="822960"/>
+          </a:xfrm>
+          <a:prstGeom prst="rect">
+            <a:avLst/>
+          </a:prstGeom>
+          <a:noFill/>
+        </p:spPr>
+        <p:txBody>
+          <a:bodyPr wrap="square">
+            <a:spAutoFit/>
+          </a:bodyPr>
+          <a:lstStyle/>
+          <a:p>
+            <a:pPr algn="ctr"/>
+            <a:r>
+              <a:rPr sz="1200">
                 <a:solidFill>
                   <a:srgbClr val="666666"/>
                 </a:solidFill>
                 <a:latin typeface="Poppins"/>
               </a:rPr>
-              <a:t>Over 8 lessons you will build an assistant that reads documents YOU choose, answers only from them, and names the file each answer came from.</a:t>
+              <a:t>Hallucination, and why pasting everything fails</a:t>
             </a:r>
           </a:p>
+        </p:txBody>
+      </p:sp>
+      <p:sp>
+        <p:nvSpPr>
+          <p:cNvPr id="18" name="Oval 17"/>
+          <p:cNvSpPr/>
+          <p:nvPr/>
+        </p:nvSpPr>
+        <p:spPr>
+          <a:xfrm>
+            <a:off x="5603965" y="4754879"/>
+            <a:ext cx="731520" cy="731520"/>
+          </a:xfrm>
+          <a:prstGeom prst="ellipse">
+            <a:avLst/>
+          </a:prstGeom>
+          <a:solidFill>
+            <a:srgbClr val="FFFFFF"/>
+          </a:solidFill>
+          <a:ln w="25400">
+            <a:solidFill>
+              <a:srgbClr val="F3F3F3"/>
+            </a:solidFill>
+          </a:ln>
+          <a:effectLst/>
+        </p:spPr>
+        <p:style>
+          <a:lnRef idx="1">
+            <a:schemeClr val="accent1"/>
+          </a:lnRef>
+          <a:fillRef idx="3">
+            <a:schemeClr val="accent1"/>
+          </a:fillRef>
+          <a:effectRef idx="2">
+            <a:schemeClr val="accent1"/>
+          </a:effectRef>
+          <a:fontRef idx="minor">
+            <a:schemeClr val="lt1"/>
+          </a:fontRef>
+        </p:style>
+        <p:txBody>
+          <a:bodyPr rtlCol="0" anchor="ctr"/>
+          <a:lstStyle/>
           <a:p>
-            <a:pPr algn="l">
-              <a:spcAft>
-                <a:spcPts val="1400"/>
-              </a:spcAft>
-            </a:pPr>
+            <a:pPr algn="ctr"/>
+          </a:p>
+        </p:txBody>
+      </p:sp>
+      <p:sp>
+        <p:nvSpPr>
+          <p:cNvPr id="19" name="TextBox 18"/>
+          <p:cNvSpPr txBox="1"/>
+          <p:nvPr/>
+        </p:nvSpPr>
+        <p:spPr>
+          <a:xfrm>
+            <a:off x="5512525" y="4864607"/>
+            <a:ext cx="914400" cy="457200"/>
+          </a:xfrm>
+          <a:prstGeom prst="rect">
+            <a:avLst/>
+          </a:prstGeom>
+          <a:noFill/>
+        </p:spPr>
+        <p:txBody>
+          <a:bodyPr wrap="square">
+            <a:spAutoFit/>
+          </a:bodyPr>
+          <a:lstStyle/>
+          <a:p>
+            <a:pPr algn="ctr"/>
             <a:r>
-              <a:rPr sz="1800">
+              <a:rPr sz="2400">
+                <a:solidFill>
+                  <a:srgbClr val="666666"/>
+                </a:solidFill>
+                <a:latin typeface="Poppins ExtraBold"/>
+              </a:rPr>
+              <a:t>3</a:t>
+            </a:r>
+          </a:p>
+        </p:txBody>
+      </p:sp>
+      <p:sp>
+        <p:nvSpPr>
+          <p:cNvPr id="20" name="TextBox 19"/>
+          <p:cNvSpPr txBox="1"/>
+          <p:nvPr/>
+        </p:nvSpPr>
+        <p:spPr>
+          <a:xfrm>
+            <a:off x="4918165" y="3886200"/>
+            <a:ext cx="2103120" cy="457200"/>
+          </a:xfrm>
+          <a:prstGeom prst="rect">
+            <a:avLst/>
+          </a:prstGeom>
+          <a:noFill/>
+        </p:spPr>
+        <p:txBody>
+          <a:bodyPr wrap="square">
+            <a:spAutoFit/>
+          </a:bodyPr>
+          <a:lstStyle/>
+          <a:p>
+            <a:pPr algn="ctr"/>
+            <a:r>
+              <a:rPr sz="1900">
+                <a:solidFill>
+                  <a:srgbClr val="434343"/>
+                </a:solidFill>
+                <a:latin typeface="Poppins ExtraBold"/>
+              </a:rPr>
+              <a:t>Chunking</a:t>
+            </a:r>
+          </a:p>
+        </p:txBody>
+      </p:sp>
+      <p:sp>
+        <p:nvSpPr>
+          <p:cNvPr id="21" name="TextBox 20"/>
+          <p:cNvSpPr txBox="1"/>
+          <p:nvPr/>
+        </p:nvSpPr>
+        <p:spPr>
+          <a:xfrm>
+            <a:off x="4735285" y="4251959"/>
+            <a:ext cx="2468880" cy="822960"/>
+          </a:xfrm>
+          <a:prstGeom prst="rect">
+            <a:avLst/>
+          </a:prstGeom>
+          <a:noFill/>
+        </p:spPr>
+        <p:txBody>
+          <a:bodyPr wrap="square">
+            <a:spAutoFit/>
+          </a:bodyPr>
+          <a:lstStyle/>
+          <a:p>
+            <a:pPr algn="ctr"/>
+            <a:r>
+              <a:rPr sz="1200">
                 <a:solidFill>
                   <a:srgbClr val="666666"/>
                 </a:solidFill>
                 <a:latin typeface="Poppins"/>
               </a:rPr>
-              <a:t>And when you ask something your notes do not cover, it will say so instead of guessing. Getting a computer to admit what it does not know is the hard part.</a:t>
+              <a:t>Splitting documents so they can be searched</a:t>
+            </a:r>
+          </a:p>
+        </p:txBody>
+      </p:sp>
+      <p:sp>
+        <p:nvSpPr>
+          <p:cNvPr id="22" name="Oval 21"/>
+          <p:cNvSpPr/>
+          <p:nvPr/>
+        </p:nvSpPr>
+        <p:spPr>
+          <a:xfrm>
+            <a:off x="7720148" y="4754879"/>
+            <a:ext cx="731520" cy="731520"/>
+          </a:xfrm>
+          <a:prstGeom prst="ellipse">
+            <a:avLst/>
+          </a:prstGeom>
+          <a:solidFill>
+            <a:srgbClr val="FFFFFF"/>
+          </a:solidFill>
+          <a:ln w="25400">
+            <a:solidFill>
+              <a:srgbClr val="F3F3F3"/>
+            </a:solidFill>
+          </a:ln>
+          <a:effectLst/>
+        </p:spPr>
+        <p:style>
+          <a:lnRef idx="1">
+            <a:schemeClr val="accent1"/>
+          </a:lnRef>
+          <a:fillRef idx="3">
+            <a:schemeClr val="accent1"/>
+          </a:fillRef>
+          <a:effectRef idx="2">
+            <a:schemeClr val="accent1"/>
+          </a:effectRef>
+          <a:fontRef idx="minor">
+            <a:schemeClr val="lt1"/>
+          </a:fontRef>
+        </p:style>
+        <p:txBody>
+          <a:bodyPr rtlCol="0" anchor="ctr"/>
+          <a:lstStyle/>
+          <a:p>
+            <a:pPr algn="ctr"/>
+          </a:p>
+        </p:txBody>
+      </p:sp>
+      <p:sp>
+        <p:nvSpPr>
+          <p:cNvPr id="23" name="TextBox 22"/>
+          <p:cNvSpPr txBox="1"/>
+          <p:nvPr/>
+        </p:nvSpPr>
+        <p:spPr>
+          <a:xfrm>
+            <a:off x="7628708" y="4864607"/>
+            <a:ext cx="914400" cy="457200"/>
+          </a:xfrm>
+          <a:prstGeom prst="rect">
+            <a:avLst/>
+          </a:prstGeom>
+          <a:noFill/>
+        </p:spPr>
+        <p:txBody>
+          <a:bodyPr wrap="square">
+            <a:spAutoFit/>
+          </a:bodyPr>
+          <a:lstStyle/>
+          <a:p>
+            <a:pPr algn="ctr"/>
+            <a:r>
+              <a:rPr sz="2400">
+                <a:solidFill>
+                  <a:srgbClr val="666666"/>
+                </a:solidFill>
+                <a:latin typeface="Poppins ExtraBold"/>
+              </a:rPr>
+              <a:t>4</a:t>
+            </a:r>
+          </a:p>
+        </p:txBody>
+      </p:sp>
+      <p:sp>
+        <p:nvSpPr>
+          <p:cNvPr id="24" name="TextBox 23"/>
+          <p:cNvSpPr txBox="1"/>
+          <p:nvPr/>
+        </p:nvSpPr>
+        <p:spPr>
+          <a:xfrm>
+            <a:off x="7034348" y="5806440"/>
+            <a:ext cx="2103120" cy="457200"/>
+          </a:xfrm>
+          <a:prstGeom prst="rect">
+            <a:avLst/>
+          </a:prstGeom>
+          <a:noFill/>
+        </p:spPr>
+        <p:txBody>
+          <a:bodyPr wrap="square">
+            <a:spAutoFit/>
+          </a:bodyPr>
+          <a:lstStyle/>
+          <a:p>
+            <a:pPr algn="ctr"/>
+            <a:r>
+              <a:rPr sz="1900">
+                <a:solidFill>
+                  <a:srgbClr val="434343"/>
+                </a:solidFill>
+                <a:latin typeface="Poppins ExtraBold"/>
+              </a:rPr>
+              <a:t>Embeddings</a:t>
+            </a:r>
+          </a:p>
+        </p:txBody>
+      </p:sp>
+      <p:sp>
+        <p:nvSpPr>
+          <p:cNvPr id="25" name="TextBox 24"/>
+          <p:cNvSpPr txBox="1"/>
+          <p:nvPr/>
+        </p:nvSpPr>
+        <p:spPr>
+          <a:xfrm>
+            <a:off x="6851468" y="6217920"/>
+            <a:ext cx="2468880" cy="822960"/>
+          </a:xfrm>
+          <a:prstGeom prst="rect">
+            <a:avLst/>
+          </a:prstGeom>
+          <a:noFill/>
+        </p:spPr>
+        <p:txBody>
+          <a:bodyPr wrap="square">
+            <a:spAutoFit/>
+          </a:bodyPr>
+          <a:lstStyle/>
+          <a:p>
+            <a:pPr algn="ctr"/>
+            <a:r>
+              <a:rPr sz="1200">
+                <a:solidFill>
+                  <a:srgbClr val="666666"/>
+                </a:solidFill>
+                <a:latin typeface="Poppins"/>
+              </a:rPr>
+              <a:t>Turning meaning into numbers you can compare</a:t>
+            </a:r>
+          </a:p>
+        </p:txBody>
+      </p:sp>
+      <p:sp>
+        <p:nvSpPr>
+          <p:cNvPr id="26" name="Oval 25"/>
+          <p:cNvSpPr/>
+          <p:nvPr/>
+        </p:nvSpPr>
+        <p:spPr>
+          <a:xfrm>
+            <a:off x="9836331" y="4754879"/>
+            <a:ext cx="731520" cy="731520"/>
+          </a:xfrm>
+          <a:prstGeom prst="ellipse">
+            <a:avLst/>
+          </a:prstGeom>
+          <a:solidFill>
+            <a:srgbClr val="FFFFFF"/>
+          </a:solidFill>
+          <a:ln w="25400">
+            <a:solidFill>
+              <a:srgbClr val="F3F3F3"/>
+            </a:solidFill>
+          </a:ln>
+          <a:effectLst/>
+        </p:spPr>
+        <p:style>
+          <a:lnRef idx="1">
+            <a:schemeClr val="accent1"/>
+          </a:lnRef>
+          <a:fillRef idx="3">
+            <a:schemeClr val="accent1"/>
+          </a:fillRef>
+          <a:effectRef idx="2">
+            <a:schemeClr val="accent1"/>
+          </a:effectRef>
+          <a:fontRef idx="minor">
+            <a:schemeClr val="lt1"/>
+          </a:fontRef>
+        </p:style>
+        <p:txBody>
+          <a:bodyPr rtlCol="0" anchor="ctr"/>
+          <a:lstStyle/>
+          <a:p>
+            <a:pPr algn="ctr"/>
+          </a:p>
+        </p:txBody>
+      </p:sp>
+      <p:sp>
+        <p:nvSpPr>
+          <p:cNvPr id="27" name="TextBox 26"/>
+          <p:cNvSpPr txBox="1"/>
+          <p:nvPr/>
+        </p:nvSpPr>
+        <p:spPr>
+          <a:xfrm>
+            <a:off x="9744891" y="4864607"/>
+            <a:ext cx="914400" cy="457200"/>
+          </a:xfrm>
+          <a:prstGeom prst="rect">
+            <a:avLst/>
+          </a:prstGeom>
+          <a:noFill/>
+        </p:spPr>
+        <p:txBody>
+          <a:bodyPr wrap="square">
+            <a:spAutoFit/>
+          </a:bodyPr>
+          <a:lstStyle/>
+          <a:p>
+            <a:pPr algn="ctr"/>
+            <a:r>
+              <a:rPr sz="2400">
+                <a:solidFill>
+                  <a:srgbClr val="666666"/>
+                </a:solidFill>
+                <a:latin typeface="Poppins ExtraBold"/>
+              </a:rPr>
+              <a:t>5</a:t>
+            </a:r>
+          </a:p>
+        </p:txBody>
+      </p:sp>
+      <p:sp>
+        <p:nvSpPr>
+          <p:cNvPr id="28" name="TextBox 27"/>
+          <p:cNvSpPr txBox="1"/>
+          <p:nvPr/>
+        </p:nvSpPr>
+        <p:spPr>
+          <a:xfrm>
+            <a:off x="9150531" y="3886200"/>
+            <a:ext cx="2103120" cy="457200"/>
+          </a:xfrm>
+          <a:prstGeom prst="rect">
+            <a:avLst/>
+          </a:prstGeom>
+          <a:noFill/>
+        </p:spPr>
+        <p:txBody>
+          <a:bodyPr wrap="square">
+            <a:spAutoFit/>
+          </a:bodyPr>
+          <a:lstStyle/>
+          <a:p>
+            <a:pPr algn="ctr"/>
+            <a:r>
+              <a:rPr sz="1900">
+                <a:solidFill>
+                  <a:srgbClr val="434343"/>
+                </a:solidFill>
+                <a:latin typeface="Poppins ExtraBold"/>
+              </a:rPr>
+              <a:t>The assistant</a:t>
+            </a:r>
+          </a:p>
+        </p:txBody>
+      </p:sp>
+      <p:sp>
+        <p:nvSpPr>
+          <p:cNvPr id="29" name="TextBox 28"/>
+          <p:cNvSpPr txBox="1"/>
+          <p:nvPr/>
+        </p:nvSpPr>
+        <p:spPr>
+          <a:xfrm>
+            <a:off x="8967651" y="4251959"/>
+            <a:ext cx="2468880" cy="822960"/>
+          </a:xfrm>
+          <a:prstGeom prst="rect">
+            <a:avLst/>
+          </a:prstGeom>
+          <a:noFill/>
+        </p:spPr>
+        <p:txBody>
+          <a:bodyPr wrap="square">
+            <a:spAutoFit/>
+          </a:bodyPr>
+          <a:lstStyle/>
+          <a:p>
+            <a:pPr algn="ctr"/>
+            <a:r>
+              <a:rPr sz="1200">
+                <a:solidFill>
+                  <a:srgbClr val="666666"/>
+                </a:solidFill>
+                <a:latin typeface="Poppins"/>
+              </a:rPr>
+              <a:t>Retrieval + prompt = grounded answers</a:t>
+            </a:r>
+          </a:p>
+        </p:txBody>
+      </p:sp>
+      <p:sp>
+        <p:nvSpPr>
+          <p:cNvPr id="30" name="Oval 29"/>
+          <p:cNvSpPr/>
+          <p:nvPr/>
+        </p:nvSpPr>
+        <p:spPr>
+          <a:xfrm>
+            <a:off x="11952514" y="4754879"/>
+            <a:ext cx="731520" cy="731520"/>
+          </a:xfrm>
+          <a:prstGeom prst="ellipse">
+            <a:avLst/>
+          </a:prstGeom>
+          <a:solidFill>
+            <a:srgbClr val="FFFFFF"/>
+          </a:solidFill>
+          <a:ln w="25400">
+            <a:solidFill>
+              <a:srgbClr val="F3F3F3"/>
+            </a:solidFill>
+          </a:ln>
+          <a:effectLst/>
+        </p:spPr>
+        <p:style>
+          <a:lnRef idx="1">
+            <a:schemeClr val="accent1"/>
+          </a:lnRef>
+          <a:fillRef idx="3">
+            <a:schemeClr val="accent1"/>
+          </a:fillRef>
+          <a:effectRef idx="2">
+            <a:schemeClr val="accent1"/>
+          </a:effectRef>
+          <a:fontRef idx="minor">
+            <a:schemeClr val="lt1"/>
+          </a:fontRef>
+        </p:style>
+        <p:txBody>
+          <a:bodyPr rtlCol="0" anchor="ctr"/>
+          <a:lstStyle/>
+          <a:p>
+            <a:pPr algn="ctr"/>
+          </a:p>
+        </p:txBody>
+      </p:sp>
+      <p:sp>
+        <p:nvSpPr>
+          <p:cNvPr id="31" name="TextBox 30"/>
+          <p:cNvSpPr txBox="1"/>
+          <p:nvPr/>
+        </p:nvSpPr>
+        <p:spPr>
+          <a:xfrm>
+            <a:off x="11861074" y="4864607"/>
+            <a:ext cx="914400" cy="457200"/>
+          </a:xfrm>
+          <a:prstGeom prst="rect">
+            <a:avLst/>
+          </a:prstGeom>
+          <a:noFill/>
+        </p:spPr>
+        <p:txBody>
+          <a:bodyPr wrap="square">
+            <a:spAutoFit/>
+          </a:bodyPr>
+          <a:lstStyle/>
+          <a:p>
+            <a:pPr algn="ctr"/>
+            <a:r>
+              <a:rPr sz="2400">
+                <a:solidFill>
+                  <a:srgbClr val="666666"/>
+                </a:solidFill>
+                <a:latin typeface="Poppins ExtraBold"/>
+              </a:rPr>
+              <a:t>6</a:t>
+            </a:r>
+          </a:p>
+        </p:txBody>
+      </p:sp>
+      <p:sp>
+        <p:nvSpPr>
+          <p:cNvPr id="32" name="TextBox 31"/>
+          <p:cNvSpPr txBox="1"/>
+          <p:nvPr/>
+        </p:nvSpPr>
+        <p:spPr>
+          <a:xfrm>
+            <a:off x="11266714" y="5806440"/>
+            <a:ext cx="2103120" cy="457200"/>
+          </a:xfrm>
+          <a:prstGeom prst="rect">
+            <a:avLst/>
+          </a:prstGeom>
+          <a:noFill/>
+        </p:spPr>
+        <p:txBody>
+          <a:bodyPr wrap="square">
+            <a:spAutoFit/>
+          </a:bodyPr>
+          <a:lstStyle/>
+          <a:p>
+            <a:pPr algn="ctr"/>
+            <a:r>
+              <a:rPr sz="1900">
+                <a:solidFill>
+                  <a:srgbClr val="434343"/>
+                </a:solidFill>
+                <a:latin typeface="Poppins ExtraBold"/>
+              </a:rPr>
+              <a:t>Real project</a:t>
+            </a:r>
+          </a:p>
+        </p:txBody>
+      </p:sp>
+      <p:sp>
+        <p:nvSpPr>
+          <p:cNvPr id="33" name="TextBox 32"/>
+          <p:cNvSpPr txBox="1"/>
+          <p:nvPr/>
+        </p:nvSpPr>
+        <p:spPr>
+          <a:xfrm>
+            <a:off x="11083834" y="6217920"/>
+            <a:ext cx="2468880" cy="822960"/>
+          </a:xfrm>
+          <a:prstGeom prst="rect">
+            <a:avLst/>
+          </a:prstGeom>
+          <a:noFill/>
+        </p:spPr>
+        <p:txBody>
+          <a:bodyPr wrap="square">
+            <a:spAutoFit/>
+          </a:bodyPr>
+          <a:lstStyle/>
+          <a:p>
+            <a:pPr algn="ctr"/>
+            <a:r>
+              <a:rPr sz="1200">
+                <a:solidFill>
+                  <a:srgbClr val="666666"/>
+                </a:solidFill>
+                <a:latin typeface="Poppins"/>
+              </a:rPr>
+              <a:t>Out of the notebook, into Python files</a:t>
+            </a:r>
+          </a:p>
+        </p:txBody>
+      </p:sp>
+      <p:sp>
+        <p:nvSpPr>
+          <p:cNvPr id="34" name="Oval 33"/>
+          <p:cNvSpPr/>
+          <p:nvPr/>
+        </p:nvSpPr>
+        <p:spPr>
+          <a:xfrm>
+            <a:off x="14068697" y="4754879"/>
+            <a:ext cx="731520" cy="731520"/>
+          </a:xfrm>
+          <a:prstGeom prst="ellipse">
+            <a:avLst/>
+          </a:prstGeom>
+          <a:solidFill>
+            <a:srgbClr val="FFFFFF"/>
+          </a:solidFill>
+          <a:ln w="25400">
+            <a:solidFill>
+              <a:srgbClr val="F3F3F3"/>
+            </a:solidFill>
+          </a:ln>
+          <a:effectLst/>
+        </p:spPr>
+        <p:style>
+          <a:lnRef idx="1">
+            <a:schemeClr val="accent1"/>
+          </a:lnRef>
+          <a:fillRef idx="3">
+            <a:schemeClr val="accent1"/>
+          </a:fillRef>
+          <a:effectRef idx="2">
+            <a:schemeClr val="accent1"/>
+          </a:effectRef>
+          <a:fontRef idx="minor">
+            <a:schemeClr val="lt1"/>
+          </a:fontRef>
+        </p:style>
+        <p:txBody>
+          <a:bodyPr rtlCol="0" anchor="ctr"/>
+          <a:lstStyle/>
+          <a:p>
+            <a:pPr algn="ctr"/>
+          </a:p>
+        </p:txBody>
+      </p:sp>
+      <p:sp>
+        <p:nvSpPr>
+          <p:cNvPr id="35" name="TextBox 34"/>
+          <p:cNvSpPr txBox="1"/>
+          <p:nvPr/>
+        </p:nvSpPr>
+        <p:spPr>
+          <a:xfrm>
+            <a:off x="13977257" y="4864607"/>
+            <a:ext cx="914400" cy="457200"/>
+          </a:xfrm>
+          <a:prstGeom prst="rect">
+            <a:avLst/>
+          </a:prstGeom>
+          <a:noFill/>
+        </p:spPr>
+        <p:txBody>
+          <a:bodyPr wrap="square">
+            <a:spAutoFit/>
+          </a:bodyPr>
+          <a:lstStyle/>
+          <a:p>
+            <a:pPr algn="ctr"/>
+            <a:r>
+              <a:rPr sz="2400">
+                <a:solidFill>
+                  <a:srgbClr val="666666"/>
+                </a:solidFill>
+                <a:latin typeface="Poppins ExtraBold"/>
+              </a:rPr>
+              <a:t>7</a:t>
+            </a:r>
+          </a:p>
+        </p:txBody>
+      </p:sp>
+      <p:sp>
+        <p:nvSpPr>
+          <p:cNvPr id="36" name="TextBox 35"/>
+          <p:cNvSpPr txBox="1"/>
+          <p:nvPr/>
+        </p:nvSpPr>
+        <p:spPr>
+          <a:xfrm>
+            <a:off x="13382897" y="3886200"/>
+            <a:ext cx="2103120" cy="457200"/>
+          </a:xfrm>
+          <a:prstGeom prst="rect">
+            <a:avLst/>
+          </a:prstGeom>
+          <a:noFill/>
+        </p:spPr>
+        <p:txBody>
+          <a:bodyPr wrap="square">
+            <a:spAutoFit/>
+          </a:bodyPr>
+          <a:lstStyle/>
+          <a:p>
+            <a:pPr algn="ctr"/>
+            <a:r>
+              <a:rPr sz="1900">
+                <a:solidFill>
+                  <a:srgbClr val="434343"/>
+                </a:solidFill>
+                <a:latin typeface="Poppins ExtraBold"/>
+              </a:rPr>
+              <a:t>Your notes</a:t>
+            </a:r>
+          </a:p>
+        </p:txBody>
+      </p:sp>
+      <p:sp>
+        <p:nvSpPr>
+          <p:cNvPr id="37" name="TextBox 36"/>
+          <p:cNvSpPr txBox="1"/>
+          <p:nvPr/>
+        </p:nvSpPr>
+        <p:spPr>
+          <a:xfrm>
+            <a:off x="13200017" y="4251959"/>
+            <a:ext cx="2468880" cy="822960"/>
+          </a:xfrm>
+          <a:prstGeom prst="rect">
+            <a:avLst/>
+          </a:prstGeom>
+          <a:noFill/>
+        </p:spPr>
+        <p:txBody>
+          <a:bodyPr wrap="square">
+            <a:spAutoFit/>
+          </a:bodyPr>
+          <a:lstStyle/>
+          <a:p>
+            <a:pPr algn="ctr"/>
+            <a:r>
+              <a:rPr sz="1200">
+                <a:solidFill>
+                  <a:srgbClr val="666666"/>
+                </a:solidFill>
+                <a:latin typeface="Poppins"/>
+              </a:rPr>
+              <a:t>Your own documents, and fixing what goes wrong</a:t>
+            </a:r>
+          </a:p>
+        </p:txBody>
+      </p:sp>
+      <p:sp>
+        <p:nvSpPr>
+          <p:cNvPr id="38" name="Oval 37"/>
+          <p:cNvSpPr/>
+          <p:nvPr/>
+        </p:nvSpPr>
+        <p:spPr>
+          <a:xfrm>
+            <a:off x="16184880" y="4754879"/>
+            <a:ext cx="731520" cy="731520"/>
+          </a:xfrm>
+          <a:prstGeom prst="ellipse">
+            <a:avLst/>
+          </a:prstGeom>
+          <a:solidFill>
+            <a:srgbClr val="FFFFFF"/>
+          </a:solidFill>
+          <a:ln w="25400">
+            <a:solidFill>
+              <a:srgbClr val="F3F3F3"/>
+            </a:solidFill>
+          </a:ln>
+          <a:effectLst/>
+        </p:spPr>
+        <p:style>
+          <a:lnRef idx="1">
+            <a:schemeClr val="accent1"/>
+          </a:lnRef>
+          <a:fillRef idx="3">
+            <a:schemeClr val="accent1"/>
+          </a:fillRef>
+          <a:effectRef idx="2">
+            <a:schemeClr val="accent1"/>
+          </a:effectRef>
+          <a:fontRef idx="minor">
+            <a:schemeClr val="lt1"/>
+          </a:fontRef>
+        </p:style>
+        <p:txBody>
+          <a:bodyPr rtlCol="0" anchor="ctr"/>
+          <a:lstStyle/>
+          <a:p>
+            <a:pPr algn="ctr"/>
+          </a:p>
+        </p:txBody>
+      </p:sp>
+      <p:sp>
+        <p:nvSpPr>
+          <p:cNvPr id="39" name="TextBox 38"/>
+          <p:cNvSpPr txBox="1"/>
+          <p:nvPr/>
+        </p:nvSpPr>
+        <p:spPr>
+          <a:xfrm>
+            <a:off x="16093440" y="4864607"/>
+            <a:ext cx="914400" cy="457200"/>
+          </a:xfrm>
+          <a:prstGeom prst="rect">
+            <a:avLst/>
+          </a:prstGeom>
+          <a:noFill/>
+        </p:spPr>
+        <p:txBody>
+          <a:bodyPr wrap="square">
+            <a:spAutoFit/>
+          </a:bodyPr>
+          <a:lstStyle/>
+          <a:p>
+            <a:pPr algn="ctr"/>
+            <a:r>
+              <a:rPr sz="2400">
+                <a:solidFill>
+                  <a:srgbClr val="666666"/>
+                </a:solidFill>
+                <a:latin typeface="Poppins ExtraBold"/>
+              </a:rPr>
+              <a:t>8</a:t>
+            </a:r>
+          </a:p>
+        </p:txBody>
+      </p:sp>
+      <p:sp>
+        <p:nvSpPr>
+          <p:cNvPr id="40" name="TextBox 39"/>
+          <p:cNvSpPr txBox="1"/>
+          <p:nvPr/>
+        </p:nvSpPr>
+        <p:spPr>
+          <a:xfrm>
+            <a:off x="15499080" y="5806440"/>
+            <a:ext cx="2103120" cy="457200"/>
+          </a:xfrm>
+          <a:prstGeom prst="rect">
+            <a:avLst/>
+          </a:prstGeom>
+          <a:noFill/>
+        </p:spPr>
+        <p:txBody>
+          <a:bodyPr wrap="square">
+            <a:spAutoFit/>
+          </a:bodyPr>
+          <a:lstStyle/>
+          <a:p>
+            <a:pPr algn="ctr"/>
+            <a:r>
+              <a:rPr sz="1900">
+                <a:solidFill>
+                  <a:srgbClr val="434343"/>
+                </a:solidFill>
+                <a:latin typeface="Poppins ExtraBold"/>
+              </a:rPr>
+              <a:t>Ship it</a:t>
+            </a:r>
+          </a:p>
+        </p:txBody>
+      </p:sp>
+      <p:sp>
+        <p:nvSpPr>
+          <p:cNvPr id="41" name="TextBox 40"/>
+          <p:cNvSpPr txBox="1"/>
+          <p:nvPr/>
+        </p:nvSpPr>
+        <p:spPr>
+          <a:xfrm>
+            <a:off x="15316200" y="6217920"/>
+            <a:ext cx="2468880" cy="822960"/>
+          </a:xfrm>
+          <a:prstGeom prst="rect">
+            <a:avLst/>
+          </a:prstGeom>
+          <a:noFill/>
+        </p:spPr>
+        <p:txBody>
+          <a:bodyPr wrap="square">
+            <a:spAutoFit/>
+          </a:bodyPr>
+          <a:lstStyle/>
+          <a:p>
+            <a:pPr algn="ctr"/>
+            <a:r>
+              <a:rPr sz="1200">
+                <a:solidFill>
+                  <a:srgbClr val="666666"/>
+                </a:solidFill>
+                <a:latin typeface="Poppins"/>
+              </a:rPr>
+              <a:t>Measure, tune, and show what you built</a:t>
+            </a:r>
+          </a:p>
+        </p:txBody>
+      </p:sp>
+      <p:sp>
+        <p:nvSpPr>
+          <p:cNvPr id="42" name="TextBox 41"/>
+          <p:cNvSpPr txBox="1"/>
+          <p:nvPr/>
+        </p:nvSpPr>
+        <p:spPr>
+          <a:xfrm>
+            <a:off x="1069848" y="8503920"/>
+            <a:ext cx="15544800" cy="548640"/>
+          </a:xfrm>
+          <a:prstGeom prst="rect">
+            <a:avLst/>
+          </a:prstGeom>
+          <a:noFill/>
+        </p:spPr>
+        <p:txBody>
+          <a:bodyPr wrap="square">
+            <a:spAutoFit/>
+          </a:bodyPr>
+          <a:lstStyle/>
+          <a:p>
+            <a:pPr algn="ctr"/>
+            <a:r>
+              <a:rPr sz="2000">
+                <a:solidFill>
+                  <a:srgbClr val="666666"/>
+                </a:solidFill>
+                <a:latin typeface="Poppins Medium"/>
+              </a:rPr>
+              <a:t>8 lessons · 2 hours each · you finish with a program that knows what you know</a:t>
             </a:r>
           </a:p>
         </p:txBody>
@@ -8876,8 +10490,8 @@
         </p:nvSpPr>
         <p:spPr>
           <a:xfrm>
-            <a:off x="0" y="54864"/>
-            <a:ext cx="18288000" cy="2084831"/>
+            <a:off x="0" y="0"/>
+            <a:ext cx="18288000" cy="3566160"/>
           </a:xfrm>
           <a:prstGeom prst="rect">
             <a:avLst/>
@@ -8920,8 +10534,8 @@
         </p:nvSpPr>
         <p:spPr>
           <a:xfrm>
-            <a:off x="3438144" y="667512"/>
-            <a:ext cx="11420856" cy="822960"/>
+            <a:off x="1069848" y="640080"/>
+            <a:ext cx="14630400" cy="731520"/>
           </a:xfrm>
           <a:prstGeom prst="rect">
             <a:avLst/>
@@ -8934,35 +10548,70 @@
           </a:bodyPr>
           <a:lstStyle/>
           <a:p>
-            <a:pPr algn="ctr"/>
+            <a:pPr algn="l"/>
             <a:r>
-              <a:rPr sz="5200">
+              <a:rPr sz="3100">
+                <a:solidFill>
+                  <a:srgbClr val="666666"/>
+                </a:solidFill>
+                <a:latin typeface="Poppins Medium"/>
+              </a:rPr>
+              <a:t>Lesson 1 of 8</a:t>
+            </a:r>
+          </a:p>
+        </p:txBody>
+      </p:sp>
+      <p:sp>
+        <p:nvSpPr>
+          <p:cNvPr id="4" name="TextBox 3"/>
+          <p:cNvSpPr txBox="1"/>
+          <p:nvPr/>
+        </p:nvSpPr>
+        <p:spPr>
+          <a:xfrm>
+            <a:off x="1069848" y="1325880"/>
+            <a:ext cx="14630400" cy="1005840"/>
+          </a:xfrm>
+          <a:prstGeom prst="rect">
+            <a:avLst/>
+          </a:prstGeom>
+          <a:noFill/>
+        </p:spPr>
+        <p:txBody>
+          <a:bodyPr wrap="square">
+            <a:spAutoFit/>
+          </a:bodyPr>
+          <a:lstStyle/>
+          <a:p>
+            <a:pPr algn="l"/>
+            <a:r>
+              <a:rPr sz="5000">
                 <a:solidFill>
                   <a:srgbClr val="3627FC"/>
                 </a:solidFill>
                 <a:latin typeface="Poppins ExtraBold"/>
               </a:rPr>
-              <a:t>Today</a:t>
+              <a:t>Setup</a:t>
             </a:r>
           </a:p>
         </p:txBody>
       </p:sp>
       <p:sp>
         <p:nvSpPr>
-          <p:cNvPr id="4" name="Rectangle 3"/>
+          <p:cNvPr id="5" name="Oval 4"/>
           <p:cNvSpPr/>
           <p:nvPr/>
         </p:nvSpPr>
         <p:spPr>
           <a:xfrm>
-            <a:off x="941832" y="3008376"/>
-            <a:ext cx="8083296" cy="3017520"/>
-          </a:xfrm>
-          <a:prstGeom prst="rect">
+            <a:off x="1453895" y="2688336"/>
+            <a:ext cx="566928" cy="566928"/>
+          </a:xfrm>
+          <a:prstGeom prst="ellipse">
             <a:avLst/>
           </a:prstGeom>
           <a:solidFill>
-            <a:srgbClr val="31C59E"/>
+            <a:srgbClr val="3627FC"/>
           </a:solidFill>
           <a:ln>
             <a:noFill/>
@@ -8993,23 +10642,60 @@
       </p:sp>
       <p:sp>
         <p:nvSpPr>
-          <p:cNvPr id="5" name="Rectangle 4"/>
+          <p:cNvPr id="6" name="TextBox 5"/>
+          <p:cNvSpPr txBox="1"/>
+          <p:nvPr/>
+        </p:nvSpPr>
+        <p:spPr>
+          <a:xfrm>
+            <a:off x="1371600" y="2798064"/>
+            <a:ext cx="731520" cy="365760"/>
+          </a:xfrm>
+          <a:prstGeom prst="rect">
+            <a:avLst/>
+          </a:prstGeom>
+          <a:noFill/>
+        </p:spPr>
+        <p:txBody>
+          <a:bodyPr wrap="square">
+            <a:spAutoFit/>
+          </a:bodyPr>
+          <a:lstStyle/>
+          <a:p>
+            <a:pPr algn="ctr"/>
+            <a:r>
+              <a:rPr sz="1600">
+                <a:solidFill>
+                  <a:srgbClr val="FFFFFF"/>
+                </a:solidFill>
+                <a:latin typeface="Poppins ExtraBold"/>
+              </a:rPr>
+              <a:t>1</a:t>
+            </a:r>
+          </a:p>
+        </p:txBody>
+      </p:sp>
+      <p:sp>
+        <p:nvSpPr>
+          <p:cNvPr id="7" name="Oval 6"/>
           <p:cNvSpPr/>
           <p:nvPr/>
         </p:nvSpPr>
         <p:spPr>
           <a:xfrm>
-            <a:off x="832104" y="2907792"/>
-            <a:ext cx="8083296" cy="3017520"/>
-          </a:xfrm>
-          <a:prstGeom prst="rect">
+            <a:off x="3652374" y="2770632"/>
+            <a:ext cx="402336" cy="402336"/>
+          </a:xfrm>
+          <a:prstGeom prst="ellipse">
             <a:avLst/>
           </a:prstGeom>
           <a:solidFill>
             <a:srgbClr val="FFFFFF"/>
           </a:solidFill>
-          <a:ln>
-            <a:noFill/>
+          <a:ln w="25400">
+            <a:solidFill>
+              <a:srgbClr val="666666"/>
+            </a:solidFill>
           </a:ln>
           <a:effectLst/>
         </p:spPr>
@@ -9037,14 +10723,14 @@
       </p:sp>
       <p:sp>
         <p:nvSpPr>
-          <p:cNvPr id="6" name="TextBox 5"/>
+          <p:cNvPr id="8" name="TextBox 7"/>
           <p:cNvSpPr txBox="1"/>
           <p:nvPr/>
         </p:nvSpPr>
         <p:spPr>
           <a:xfrm>
-            <a:off x="2221991" y="3648456"/>
-            <a:ext cx="6035040" cy="640080"/>
+            <a:off x="3487782" y="2834640"/>
+            <a:ext cx="731520" cy="365760"/>
           </a:xfrm>
           <a:prstGeom prst="rect">
             <a:avLst/>
@@ -9057,73 +10743,40 @@
           </a:bodyPr>
           <a:lstStyle/>
           <a:p>
-            <a:pPr algn="l"/>
+            <a:pPr algn="ctr"/>
             <a:r>
-              <a:rPr sz="3200">
-                <a:solidFill>
-                  <a:srgbClr val="434343"/>
+              <a:rPr sz="1300">
+                <a:solidFill>
+                  <a:srgbClr val="666666"/>
                 </a:solidFill>
                 <a:latin typeface="Poppins ExtraBold"/>
               </a:rPr>
-              <a:t>Set up</a:t>
+              <a:t>2</a:t>
             </a:r>
           </a:p>
         </p:txBody>
       </p:sp>
       <p:sp>
         <p:nvSpPr>
-          <p:cNvPr id="7" name="TextBox 6"/>
-          <p:cNvSpPr txBox="1"/>
-          <p:nvPr/>
-        </p:nvSpPr>
-        <p:spPr>
-          <a:xfrm>
-            <a:off x="2221991" y="4471416"/>
-            <a:ext cx="5486400" cy="1280160"/>
-          </a:xfrm>
-          <a:prstGeom prst="rect">
-            <a:avLst/>
-          </a:prstGeom>
-          <a:noFill/>
-        </p:spPr>
-        <p:txBody>
-          <a:bodyPr wrap="square">
-            <a:spAutoFit/>
-          </a:bodyPr>
-          <a:lstStyle/>
-          <a:p>
-            <a:pPr algn="l"/>
-            <a:r>
-              <a:rPr sz="1800">
-                <a:solidFill>
-                  <a:srgbClr val="434343"/>
-                </a:solidFill>
-                <a:latin typeface="Poppins"/>
-              </a:rPr>
-              <a:t>Python, VS Code and your keys. Your work lives in your shared folder.</a:t>
-            </a:r>
-          </a:p>
-        </p:txBody>
-      </p:sp>
-      <p:sp>
-        <p:nvSpPr>
-          <p:cNvPr id="8" name="Rectangle 7"/>
+          <p:cNvPr id="9" name="Oval 8"/>
           <p:cNvSpPr/>
           <p:nvPr/>
         </p:nvSpPr>
         <p:spPr>
           <a:xfrm>
-            <a:off x="9372600" y="3008376"/>
-            <a:ext cx="8083296" cy="3017520"/>
-          </a:xfrm>
-          <a:prstGeom prst="rect">
+            <a:off x="5768557" y="2770632"/>
+            <a:ext cx="402336" cy="402336"/>
+          </a:xfrm>
+          <a:prstGeom prst="ellipse">
             <a:avLst/>
           </a:prstGeom>
           <a:solidFill>
-            <a:srgbClr val="31C59E"/>
+            <a:srgbClr val="FFFFFF"/>
           </a:solidFill>
-          <a:ln>
-            <a:noFill/>
+          <a:ln w="25400">
+            <a:solidFill>
+              <a:srgbClr val="666666"/>
+            </a:solidFill>
           </a:ln>
           <a:effectLst/>
         </p:spPr>
@@ -9151,23 +10804,60 @@
       </p:sp>
       <p:sp>
         <p:nvSpPr>
-          <p:cNvPr id="9" name="Rectangle 8"/>
+          <p:cNvPr id="10" name="TextBox 9"/>
+          <p:cNvSpPr txBox="1"/>
+          <p:nvPr/>
+        </p:nvSpPr>
+        <p:spPr>
+          <a:xfrm>
+            <a:off x="5603965" y="2834640"/>
+            <a:ext cx="731520" cy="365760"/>
+          </a:xfrm>
+          <a:prstGeom prst="rect">
+            <a:avLst/>
+          </a:prstGeom>
+          <a:noFill/>
+        </p:spPr>
+        <p:txBody>
+          <a:bodyPr wrap="square">
+            <a:spAutoFit/>
+          </a:bodyPr>
+          <a:lstStyle/>
+          <a:p>
+            <a:pPr algn="ctr"/>
+            <a:r>
+              <a:rPr sz="1300">
+                <a:solidFill>
+                  <a:srgbClr val="666666"/>
+                </a:solidFill>
+                <a:latin typeface="Poppins ExtraBold"/>
+              </a:rPr>
+              <a:t>3</a:t>
+            </a:r>
+          </a:p>
+        </p:txBody>
+      </p:sp>
+      <p:sp>
+        <p:nvSpPr>
+          <p:cNvPr id="11" name="Oval 10"/>
           <p:cNvSpPr/>
           <p:nvPr/>
         </p:nvSpPr>
         <p:spPr>
           <a:xfrm>
-            <a:off x="9262872" y="2907792"/>
-            <a:ext cx="8083296" cy="3017520"/>
-          </a:xfrm>
-          <a:prstGeom prst="rect">
+            <a:off x="7884740" y="2770632"/>
+            <a:ext cx="402336" cy="402336"/>
+          </a:xfrm>
+          <a:prstGeom prst="ellipse">
             <a:avLst/>
           </a:prstGeom>
           <a:solidFill>
             <a:srgbClr val="FFFFFF"/>
           </a:solidFill>
-          <a:ln>
-            <a:noFill/>
+          <a:ln w="25400">
+            <a:solidFill>
+              <a:srgbClr val="666666"/>
+            </a:solidFill>
           </a:ln>
           <a:effectLst/>
         </p:spPr>
@@ -9195,14 +10885,14 @@
       </p:sp>
       <p:sp>
         <p:nvSpPr>
-          <p:cNvPr id="10" name="TextBox 9"/>
+          <p:cNvPr id="12" name="TextBox 11"/>
           <p:cNvSpPr txBox="1"/>
           <p:nvPr/>
         </p:nvSpPr>
         <p:spPr>
           <a:xfrm>
-            <a:off x="10652760" y="3648456"/>
-            <a:ext cx="6035040" cy="640080"/>
+            <a:off x="7720148" y="2834640"/>
+            <a:ext cx="731520" cy="365760"/>
           </a:xfrm>
           <a:prstGeom prst="rect">
             <a:avLst/>
@@ -9215,73 +10905,40 @@
           </a:bodyPr>
           <a:lstStyle/>
           <a:p>
-            <a:pPr algn="l"/>
+            <a:pPr algn="ctr"/>
             <a:r>
-              <a:rPr sz="3200">
-                <a:solidFill>
-                  <a:srgbClr val="434343"/>
+              <a:rPr sz="1300">
+                <a:solidFill>
+                  <a:srgbClr val="666666"/>
                 </a:solidFill>
                 <a:latin typeface="Poppins ExtraBold"/>
               </a:rPr>
-              <a:t>First AI call</a:t>
+              <a:t>4</a:t>
             </a:r>
           </a:p>
         </p:txBody>
       </p:sp>
       <p:sp>
         <p:nvSpPr>
-          <p:cNvPr id="11" name="TextBox 10"/>
-          <p:cNvSpPr txBox="1"/>
-          <p:nvPr/>
-        </p:nvSpPr>
-        <p:spPr>
-          <a:xfrm>
-            <a:off x="10652760" y="4471416"/>
-            <a:ext cx="5486400" cy="1280160"/>
-          </a:xfrm>
-          <a:prstGeom prst="rect">
-            <a:avLst/>
-          </a:prstGeom>
-          <a:noFill/>
-        </p:spPr>
-        <p:txBody>
-          <a:bodyPr wrap="square">
-            <a:spAutoFit/>
-          </a:bodyPr>
-          <a:lstStyle/>
-          <a:p>
-            <a:pPr algn="l"/>
-            <a:r>
-              <a:rPr sz="1800">
-                <a:solidFill>
-                  <a:srgbClr val="434343"/>
-                </a:solidFill>
-                <a:latin typeface="Poppins"/>
-              </a:rPr>
-              <a:t>Send a message to Claude and look at what actually comes back.</a:t>
-            </a:r>
-          </a:p>
-        </p:txBody>
-      </p:sp>
-      <p:sp>
-        <p:nvSpPr>
-          <p:cNvPr id="12" name="Rectangle 11"/>
+          <p:cNvPr id="13" name="Oval 12"/>
           <p:cNvSpPr/>
           <p:nvPr/>
         </p:nvSpPr>
         <p:spPr>
           <a:xfrm>
-            <a:off x="941832" y="6428232"/>
-            <a:ext cx="8083296" cy="3017520"/>
-          </a:xfrm>
-          <a:prstGeom prst="rect">
+            <a:off x="10000923" y="2770632"/>
+            <a:ext cx="402336" cy="402336"/>
+          </a:xfrm>
+          <a:prstGeom prst="ellipse">
             <a:avLst/>
           </a:prstGeom>
           <a:solidFill>
-            <a:srgbClr val="31C59E"/>
+            <a:srgbClr val="FFFFFF"/>
           </a:solidFill>
-          <a:ln>
-            <a:noFill/>
+          <a:ln w="25400">
+            <a:solidFill>
+              <a:srgbClr val="666666"/>
+            </a:solidFill>
           </a:ln>
           <a:effectLst/>
         </p:spPr>
@@ -9309,23 +10966,60 @@
       </p:sp>
       <p:sp>
         <p:nvSpPr>
-          <p:cNvPr id="13" name="Rectangle 12"/>
+          <p:cNvPr id="14" name="TextBox 13"/>
+          <p:cNvSpPr txBox="1"/>
+          <p:nvPr/>
+        </p:nvSpPr>
+        <p:spPr>
+          <a:xfrm>
+            <a:off x="9836331" y="2834640"/>
+            <a:ext cx="731520" cy="365760"/>
+          </a:xfrm>
+          <a:prstGeom prst="rect">
+            <a:avLst/>
+          </a:prstGeom>
+          <a:noFill/>
+        </p:spPr>
+        <p:txBody>
+          <a:bodyPr wrap="square">
+            <a:spAutoFit/>
+          </a:bodyPr>
+          <a:lstStyle/>
+          <a:p>
+            <a:pPr algn="ctr"/>
+            <a:r>
+              <a:rPr sz="1300">
+                <a:solidFill>
+                  <a:srgbClr val="666666"/>
+                </a:solidFill>
+                <a:latin typeface="Poppins ExtraBold"/>
+              </a:rPr>
+              <a:t>5</a:t>
+            </a:r>
+          </a:p>
+        </p:txBody>
+      </p:sp>
+      <p:sp>
+        <p:nvSpPr>
+          <p:cNvPr id="15" name="Oval 14"/>
           <p:cNvSpPr/>
           <p:nvPr/>
         </p:nvSpPr>
         <p:spPr>
           <a:xfrm>
-            <a:off x="832104" y="6327648"/>
-            <a:ext cx="8083296" cy="3017520"/>
-          </a:xfrm>
-          <a:prstGeom prst="rect">
+            <a:off x="12117106" y="2770632"/>
+            <a:ext cx="402336" cy="402336"/>
+          </a:xfrm>
+          <a:prstGeom prst="ellipse">
             <a:avLst/>
           </a:prstGeom>
           <a:solidFill>
             <a:srgbClr val="FFFFFF"/>
           </a:solidFill>
-          <a:ln>
-            <a:noFill/>
+          <a:ln w="25400">
+            <a:solidFill>
+              <a:srgbClr val="666666"/>
+            </a:solidFill>
           </a:ln>
           <a:effectLst/>
         </p:spPr>
@@ -9353,14 +11047,14 @@
       </p:sp>
       <p:sp>
         <p:nvSpPr>
-          <p:cNvPr id="14" name="TextBox 13"/>
+          <p:cNvPr id="16" name="TextBox 15"/>
           <p:cNvSpPr txBox="1"/>
           <p:nvPr/>
         </p:nvSpPr>
         <p:spPr>
           <a:xfrm>
-            <a:off x="2221991" y="7068312"/>
-            <a:ext cx="6035040" cy="640080"/>
+            <a:off x="11952514" y="2834640"/>
+            <a:ext cx="731520" cy="365760"/>
           </a:xfrm>
           <a:prstGeom prst="rect">
             <a:avLst/>
@@ -9373,73 +11067,40 @@
           </a:bodyPr>
           <a:lstStyle/>
           <a:p>
-            <a:pPr algn="l"/>
+            <a:pPr algn="ctr"/>
             <a:r>
-              <a:rPr sz="3200">
-                <a:solidFill>
-                  <a:srgbClr val="434343"/>
+              <a:rPr sz="1300">
+                <a:solidFill>
+                  <a:srgbClr val="666666"/>
                 </a:solidFill>
                 <a:latin typeface="Poppins ExtraBold"/>
               </a:rPr>
-              <a:t>System prompts</a:t>
+              <a:t>6</a:t>
             </a:r>
           </a:p>
         </p:txBody>
       </p:sp>
       <p:sp>
         <p:nvSpPr>
-          <p:cNvPr id="15" name="TextBox 14"/>
-          <p:cNvSpPr txBox="1"/>
-          <p:nvPr/>
-        </p:nvSpPr>
-        <p:spPr>
-          <a:xfrm>
-            <a:off x="2221991" y="7891272"/>
-            <a:ext cx="5486400" cy="1280160"/>
-          </a:xfrm>
-          <a:prstGeom prst="rect">
-            <a:avLst/>
-          </a:prstGeom>
-          <a:noFill/>
-        </p:spPr>
-        <p:txBody>
-          <a:bodyPr wrap="square">
-            <a:spAutoFit/>
-          </a:bodyPr>
-          <a:lstStyle/>
-          <a:p>
-            <a:pPr algn="l"/>
-            <a:r>
-              <a:rPr sz="1800">
-                <a:solidFill>
-                  <a:srgbClr val="434343"/>
-                </a:solidFill>
-                <a:latin typeface="Poppins"/>
-              </a:rPr>
-              <a:t>Give the model a job. One question, three different assistants.</a:t>
-            </a:r>
-          </a:p>
-        </p:txBody>
-      </p:sp>
-      <p:sp>
-        <p:nvSpPr>
-          <p:cNvPr id="16" name="Rectangle 15"/>
+          <p:cNvPr id="17" name="Oval 16"/>
           <p:cNvSpPr/>
           <p:nvPr/>
         </p:nvSpPr>
         <p:spPr>
           <a:xfrm>
-            <a:off x="9372600" y="6428232"/>
-            <a:ext cx="8083296" cy="3017520"/>
-          </a:xfrm>
-          <a:prstGeom prst="rect">
+            <a:off x="14233289" y="2770632"/>
+            <a:ext cx="402336" cy="402336"/>
+          </a:xfrm>
+          <a:prstGeom prst="ellipse">
             <a:avLst/>
           </a:prstGeom>
           <a:solidFill>
-            <a:srgbClr val="31C59E"/>
+            <a:srgbClr val="FFFFFF"/>
           </a:solidFill>
-          <a:ln>
-            <a:noFill/>
+          <a:ln w="25400">
+            <a:solidFill>
+              <a:srgbClr val="666666"/>
+            </a:solidFill>
           </a:ln>
           <a:effectLst/>
         </p:spPr>
@@ -9467,23 +11128,60 @@
       </p:sp>
       <p:sp>
         <p:nvSpPr>
-          <p:cNvPr id="17" name="Rectangle 16"/>
+          <p:cNvPr id="18" name="TextBox 17"/>
+          <p:cNvSpPr txBox="1"/>
+          <p:nvPr/>
+        </p:nvSpPr>
+        <p:spPr>
+          <a:xfrm>
+            <a:off x="14068697" y="2834640"/>
+            <a:ext cx="731520" cy="365760"/>
+          </a:xfrm>
+          <a:prstGeom prst="rect">
+            <a:avLst/>
+          </a:prstGeom>
+          <a:noFill/>
+        </p:spPr>
+        <p:txBody>
+          <a:bodyPr wrap="square">
+            <a:spAutoFit/>
+          </a:bodyPr>
+          <a:lstStyle/>
+          <a:p>
+            <a:pPr algn="ctr"/>
+            <a:r>
+              <a:rPr sz="1300">
+                <a:solidFill>
+                  <a:srgbClr val="666666"/>
+                </a:solidFill>
+                <a:latin typeface="Poppins ExtraBold"/>
+              </a:rPr>
+              <a:t>7</a:t>
+            </a:r>
+          </a:p>
+        </p:txBody>
+      </p:sp>
+      <p:sp>
+        <p:nvSpPr>
+          <p:cNvPr id="19" name="Oval 18"/>
           <p:cNvSpPr/>
           <p:nvPr/>
         </p:nvSpPr>
         <p:spPr>
           <a:xfrm>
-            <a:off x="9262872" y="6327648"/>
-            <a:ext cx="8083296" cy="3017520"/>
-          </a:xfrm>
-          <a:prstGeom prst="rect">
+            <a:off x="16349472" y="2770632"/>
+            <a:ext cx="402336" cy="402336"/>
+          </a:xfrm>
+          <a:prstGeom prst="ellipse">
             <a:avLst/>
           </a:prstGeom>
           <a:solidFill>
             <a:srgbClr val="FFFFFF"/>
           </a:solidFill>
-          <a:ln>
-            <a:noFill/>
+          <a:ln w="25400">
+            <a:solidFill>
+              <a:srgbClr val="666666"/>
+            </a:solidFill>
           </a:ln>
           <a:effectLst/>
         </p:spPr>
@@ -9511,14 +11209,49 @@
       </p:sp>
       <p:sp>
         <p:nvSpPr>
-          <p:cNvPr id="18" name="TextBox 17"/>
+          <p:cNvPr id="20" name="TextBox 19"/>
           <p:cNvSpPr txBox="1"/>
           <p:nvPr/>
         </p:nvSpPr>
         <p:spPr>
           <a:xfrm>
-            <a:off x="10652760" y="7068312"/>
-            <a:ext cx="6035040" cy="640080"/>
+            <a:off x="16184880" y="2834640"/>
+            <a:ext cx="731520" cy="365760"/>
+          </a:xfrm>
+          <a:prstGeom prst="rect">
+            <a:avLst/>
+          </a:prstGeom>
+          <a:noFill/>
+        </p:spPr>
+        <p:txBody>
+          <a:bodyPr wrap="square">
+            <a:spAutoFit/>
+          </a:bodyPr>
+          <a:lstStyle/>
+          <a:p>
+            <a:pPr algn="ctr"/>
+            <a:r>
+              <a:rPr sz="1300">
+                <a:solidFill>
+                  <a:srgbClr val="666666"/>
+                </a:solidFill>
+                <a:latin typeface="Poppins ExtraBold"/>
+              </a:rPr>
+              <a:t>8</a:t>
+            </a:r>
+          </a:p>
+        </p:txBody>
+      </p:sp>
+      <p:sp>
+        <p:nvSpPr>
+          <p:cNvPr id="21" name="TextBox 20"/>
+          <p:cNvSpPr txBox="1"/>
+          <p:nvPr/>
+        </p:nvSpPr>
+        <p:spPr>
+          <a:xfrm>
+            <a:off x="1069848" y="4206240"/>
+            <a:ext cx="6949440" cy="548640"/>
           </a:xfrm>
           <a:prstGeom prst="rect">
             <a:avLst/>
@@ -9533,27 +11266,110 @@
           <a:p>
             <a:pPr algn="l"/>
             <a:r>
-              <a:rPr sz="3200">
-                <a:solidFill>
-                  <a:srgbClr val="434343"/>
+              <a:rPr sz="2800">
+                <a:solidFill>
+                  <a:srgbClr val="31C59E"/>
                 </a:solidFill>
                 <a:latin typeface="Poppins ExtraBold"/>
               </a:rPr>
-              <a:t>Make it obey</a:t>
+              <a:t>You already know</a:t>
             </a:r>
           </a:p>
         </p:txBody>
       </p:sp>
       <p:sp>
         <p:nvSpPr>
-          <p:cNvPr id="19" name="TextBox 18"/>
+          <p:cNvPr id="22" name="TextBox 21"/>
           <p:cNvSpPr txBox="1"/>
           <p:nvPr/>
         </p:nvSpPr>
         <p:spPr>
           <a:xfrm>
-            <a:off x="10652760" y="7891272"/>
-            <a:ext cx="5486400" cy="1280160"/>
+            <a:off x="1069848" y="4937760"/>
+            <a:ext cx="7223760" cy="4023360"/>
+          </a:xfrm>
+          <a:prstGeom prst="rect">
+            <a:avLst/>
+          </a:prstGeom>
+          <a:noFill/>
+        </p:spPr>
+        <p:txBody>
+          <a:bodyPr wrap="square">
+            <a:spAutoFit/>
+          </a:bodyPr>
+          <a:lstStyle/>
+          <a:p>
+            <a:pPr algn="l">
+              <a:spcAft>
+                <a:spcPts val="1300"/>
+              </a:spcAft>
+            </a:pPr>
+            <a:r>
+              <a:rPr sz="1700">
+                <a:solidFill>
+                  <a:srgbClr val="434343"/>
+                </a:solidFill>
+                <a:latin typeface="Poppins"/>
+              </a:rPr>
+              <a:t>Nothing yet - this is where it starts.</a:t>
+            </a:r>
+          </a:p>
+        </p:txBody>
+      </p:sp>
+      <p:sp>
+        <p:nvSpPr>
+          <p:cNvPr id="23" name="Rectangle 22"/>
+          <p:cNvSpPr/>
+          <p:nvPr/>
+        </p:nvSpPr>
+        <p:spPr>
+          <a:xfrm>
+            <a:off x="8778240" y="3977639"/>
+            <a:ext cx="64008" cy="4754880"/>
+          </a:xfrm>
+          <a:prstGeom prst="rect">
+            <a:avLst/>
+          </a:prstGeom>
+          <a:solidFill>
+            <a:srgbClr val="3627FC"/>
+          </a:solidFill>
+          <a:ln>
+            <a:noFill/>
+          </a:ln>
+          <a:effectLst/>
+        </p:spPr>
+        <p:style>
+          <a:lnRef idx="1">
+            <a:schemeClr val="accent1"/>
+          </a:lnRef>
+          <a:fillRef idx="3">
+            <a:schemeClr val="accent1"/>
+          </a:fillRef>
+          <a:effectRef idx="2">
+            <a:schemeClr val="accent1"/>
+          </a:effectRef>
+          <a:fontRef idx="minor">
+            <a:schemeClr val="lt1"/>
+          </a:fontRef>
+        </p:style>
+        <p:txBody>
+          <a:bodyPr rtlCol="0" anchor="ctr"/>
+          <a:lstStyle/>
+          <a:p>
+            <a:pPr algn="ctr"/>
+          </a:p>
+        </p:txBody>
+      </p:sp>
+      <p:sp>
+        <p:nvSpPr>
+          <p:cNvPr id="24" name="TextBox 23"/>
+          <p:cNvSpPr txBox="1"/>
+          <p:nvPr/>
+        </p:nvSpPr>
+        <p:spPr>
+          <a:xfrm>
+            <a:off x="9235440" y="4206240"/>
+            <a:ext cx="4754880" cy="548640"/>
           </a:xfrm>
           <a:prstGeom prst="rect">
             <a:avLst/>
@@ -9568,13 +11384,222 @@
           <a:p>
             <a:pPr algn="l"/>
             <a:r>
-              <a:rPr sz="1800">
+              <a:rPr sz="2800">
+                <a:solidFill>
+                  <a:srgbClr val="3627FC"/>
+                </a:solidFill>
+                <a:latin typeface="Poppins ExtraBold"/>
+              </a:rPr>
+              <a:t>Today</a:t>
+            </a:r>
+          </a:p>
+        </p:txBody>
+      </p:sp>
+      <p:sp>
+        <p:nvSpPr>
+          <p:cNvPr id="25" name="TextBox 24"/>
+          <p:cNvSpPr txBox="1"/>
+          <p:nvPr/>
+        </p:nvSpPr>
+        <p:spPr>
+          <a:xfrm>
+            <a:off x="9235440" y="4937760"/>
+            <a:ext cx="4754880" cy="4023360"/>
+          </a:xfrm>
+          <a:prstGeom prst="rect">
+            <a:avLst/>
+          </a:prstGeom>
+          <a:noFill/>
+        </p:spPr>
+        <p:txBody>
+          <a:bodyPr wrap="square">
+            <a:spAutoFit/>
+          </a:bodyPr>
+          <a:lstStyle/>
+          <a:p>
+            <a:pPr algn="l">
+              <a:spcAft>
+                <a:spcPts val="1300"/>
+              </a:spcAft>
+            </a:pPr>
+            <a:r>
+              <a:rPr sz="2200">
                 <a:solidFill>
                   <a:srgbClr val="434343"/>
+                </a:solidFill>
+                <a:latin typeface="Poppins SemiBold"/>
+              </a:rPr>
+              <a:t>Your first AI call, and system prompts</a:t>
+            </a:r>
+          </a:p>
+        </p:txBody>
+      </p:sp>
+      <p:sp>
+        <p:nvSpPr>
+          <p:cNvPr id="26" name="TextBox 25"/>
+          <p:cNvSpPr txBox="1"/>
+          <p:nvPr/>
+        </p:nvSpPr>
+        <p:spPr>
+          <a:xfrm>
+            <a:off x="14447520" y="4206240"/>
+            <a:ext cx="3108960" cy="548640"/>
+          </a:xfrm>
+          <a:prstGeom prst="rect">
+            <a:avLst/>
+          </a:prstGeom>
+          <a:noFill/>
+        </p:spPr>
+        <p:txBody>
+          <a:bodyPr wrap="square">
+            <a:spAutoFit/>
+          </a:bodyPr>
+          <a:lstStyle/>
+          <a:p>
+            <a:pPr algn="l"/>
+            <a:r>
+              <a:rPr sz="2800">
+                <a:solidFill>
+                  <a:srgbClr val="666666"/>
+                </a:solidFill>
+                <a:latin typeface="Poppins ExtraBold"/>
+              </a:rPr>
+              <a:t>Still ahead</a:t>
+            </a:r>
+          </a:p>
+        </p:txBody>
+      </p:sp>
+      <p:sp>
+        <p:nvSpPr>
+          <p:cNvPr id="27" name="TextBox 26"/>
+          <p:cNvSpPr txBox="1"/>
+          <p:nvPr/>
+        </p:nvSpPr>
+        <p:spPr>
+          <a:xfrm>
+            <a:off x="14447520" y="4937760"/>
+            <a:ext cx="3291840" cy="4023360"/>
+          </a:xfrm>
+          <a:prstGeom prst="rect">
+            <a:avLst/>
+          </a:prstGeom>
+          <a:noFill/>
+        </p:spPr>
+        <p:txBody>
+          <a:bodyPr wrap="square">
+            <a:spAutoFit/>
+          </a:bodyPr>
+          <a:lstStyle/>
+          <a:p>
+            <a:pPr algn="l">
+              <a:spcAft>
+                <a:spcPts val="1300"/>
+              </a:spcAft>
+            </a:pPr>
+            <a:r>
+              <a:rPr sz="1700">
+                <a:solidFill>
+                  <a:srgbClr val="666666"/>
                 </a:solidFill>
                 <a:latin typeface="Poppins"/>
               </a:rPr>
-              <a:t>Control length, format and language - then make it refuse.</a:t>
+              <a:t>2.  Why AI lies</a:t>
+            </a:r>
+          </a:p>
+          <a:p>
+            <a:pPr algn="l">
+              <a:spcAft>
+                <a:spcPts val="1300"/>
+              </a:spcAft>
+            </a:pPr>
+            <a:r>
+              <a:rPr sz="1700">
+                <a:solidFill>
+                  <a:srgbClr val="666666"/>
+                </a:solidFill>
+                <a:latin typeface="Poppins"/>
+              </a:rPr>
+              <a:t>3.  Chunking</a:t>
+            </a:r>
+          </a:p>
+          <a:p>
+            <a:pPr algn="l">
+              <a:spcAft>
+                <a:spcPts val="1300"/>
+              </a:spcAft>
+            </a:pPr>
+            <a:r>
+              <a:rPr sz="1700">
+                <a:solidFill>
+                  <a:srgbClr val="666666"/>
+                </a:solidFill>
+                <a:latin typeface="Poppins"/>
+              </a:rPr>
+              <a:t>4.  Embeddings</a:t>
+            </a:r>
+          </a:p>
+          <a:p>
+            <a:pPr algn="l">
+              <a:spcAft>
+                <a:spcPts val="1300"/>
+              </a:spcAft>
+            </a:pPr>
+            <a:r>
+              <a:rPr sz="1700">
+                <a:solidFill>
+                  <a:srgbClr val="666666"/>
+                </a:solidFill>
+                <a:latin typeface="Poppins"/>
+              </a:rPr>
+              <a:t>5.  The assistant</a:t>
+            </a:r>
+          </a:p>
+          <a:p>
+            <a:pPr algn="l">
+              <a:spcAft>
+                <a:spcPts val="1300"/>
+              </a:spcAft>
+            </a:pPr>
+            <a:r>
+              <a:rPr sz="1700">
+                <a:solidFill>
+                  <a:srgbClr val="666666"/>
+                </a:solidFill>
+                <a:latin typeface="Poppins"/>
+              </a:rPr>
+              <a:t>6.  Real project</a:t>
+            </a:r>
+          </a:p>
+          <a:p>
+            <a:pPr algn="l">
+              <a:spcAft>
+                <a:spcPts val="1300"/>
+              </a:spcAft>
+            </a:pPr>
+            <a:r>
+              <a:rPr sz="1700">
+                <a:solidFill>
+                  <a:srgbClr val="666666"/>
+                </a:solidFill>
+                <a:latin typeface="Poppins"/>
+              </a:rPr>
+              <a:t>7.  Your notes</a:t>
+            </a:r>
+          </a:p>
+          <a:p>
+            <a:pPr algn="l">
+              <a:spcAft>
+                <a:spcPts val="1300"/>
+              </a:spcAft>
+            </a:pPr>
+            <a:r>
+              <a:rPr sz="1700">
+                <a:solidFill>
+                  <a:srgbClr val="666666"/>
+                </a:solidFill>
+                <a:latin typeface="Poppins"/>
+              </a:rPr>
+              <a:t>8.  Ship it</a:t>
             </a:r>
           </a:p>
         </p:txBody>
@@ -9649,43 +11674,8 @@
         </p:nvSpPr>
         <p:spPr>
           <a:xfrm>
-            <a:off x="1069848" y="3849624"/>
-            <a:ext cx="5961888" cy="548640"/>
-          </a:xfrm>
-          <a:prstGeom prst="rect">
-            <a:avLst/>
-          </a:prstGeom>
-          <a:noFill/>
-        </p:spPr>
-        <p:txBody>
-          <a:bodyPr wrap="square">
-            <a:spAutoFit/>
-          </a:bodyPr>
-          <a:lstStyle/>
-          <a:p>
-            <a:pPr algn="l"/>
-            <a:r>
-              <a:rPr sz="3100">
-                <a:solidFill>
-                  <a:srgbClr val="666666"/>
-                </a:solidFill>
-                <a:latin typeface="Poppins Medium"/>
-              </a:rPr>
-              <a:t>Step 1</a:t>
-            </a:r>
-          </a:p>
-        </p:txBody>
-      </p:sp>
-      <p:sp>
-        <p:nvSpPr>
-          <p:cNvPr id="4" name="TextBox 3"/>
-          <p:cNvSpPr txBox="1"/>
-          <p:nvPr/>
-        </p:nvSpPr>
-        <p:spPr>
-          <a:xfrm>
-            <a:off x="1069848" y="4572000"/>
-            <a:ext cx="7754112" cy="1828800"/>
+            <a:off x="1069848" y="2788920"/>
+            <a:ext cx="7754112" cy="1097280"/>
           </a:xfrm>
           <a:prstGeom prst="rect">
             <a:avLst/>
@@ -9706,21 +11696,21 @@
                 </a:solidFill>
                 <a:latin typeface="Poppins ExtraBold"/>
               </a:rPr>
-              <a:t>Setup</a:t>
+              <a:t>Workshop Overview</a:t>
             </a:r>
           </a:p>
         </p:txBody>
       </p:sp>
       <p:sp>
         <p:nvSpPr>
-          <p:cNvPr id="5" name="TextBox 4"/>
+          <p:cNvPr id="4" name="TextBox 3"/>
           <p:cNvSpPr txBox="1"/>
           <p:nvPr/>
         </p:nvSpPr>
         <p:spPr>
           <a:xfrm>
-            <a:off x="9985248" y="3108960"/>
-            <a:ext cx="7242048" cy="4572000"/>
+            <a:off x="9985248" y="2633472"/>
+            <a:ext cx="7242048" cy="5029200"/>
           </a:xfrm>
           <a:prstGeom prst="rect">
             <a:avLst/>
@@ -9735,65 +11725,49 @@
           <a:p>
             <a:pPr algn="l">
               <a:spcAft>
-                <a:spcPts val="1600"/>
+                <a:spcPts val="1400"/>
               </a:spcAft>
             </a:pPr>
             <a:r>
               <a:rPr sz="1800">
                 <a:solidFill>
-                  <a:srgbClr val="3627FC"/>
-                </a:solidFill>
-                <a:latin typeface="Poppins SemiBold"/>
+                  <a:srgbClr val="666666"/>
+                </a:solidFill>
+                <a:latin typeface="Poppins"/>
               </a:rPr>
-              <a:t>Everything is already installed - you are connecting pieces, not installing them.</a:t>
+              <a:t>Ask a chatbot about your homework and it answers confidently - and sometimes invents the answer completely. It has never seen your notes.</a:t>
             </a:r>
           </a:p>
           <a:p>
             <a:pPr algn="l">
               <a:spcAft>
-                <a:spcPts val="1600"/>
+                <a:spcPts val="1400"/>
               </a:spcAft>
             </a:pPr>
             <a:r>
               <a:rPr sz="1800">
                 <a:solidFill>
-                  <a:srgbClr val="3627FC"/>
-                </a:solidFill>
-                <a:latin typeface="Poppins SemiBold"/>
+                  <a:srgbClr val="666666"/>
+                </a:solidFill>
+                <a:latin typeface="Poppins"/>
               </a:rPr>
-              <a:t>Python lives on the laptop. YOUR WORK lives in your shared folder, because you may be at a different Mac next lesson.</a:t>
+              <a:t>Over 8 lessons you will build an assistant that reads documents YOU choose, answers only from them, and names the file each answer came from.</a:t>
             </a:r>
           </a:p>
           <a:p>
             <a:pPr algn="l">
               <a:spcAft>
-                <a:spcPts val="1600"/>
+                <a:spcPts val="1400"/>
               </a:spcAft>
             </a:pPr>
             <a:r>
               <a:rPr sz="1800">
                 <a:solidFill>
-                  <a:srgbClr val="3627FC"/>
-                </a:solidFill>
-                <a:latin typeface="Poppins SemiBold"/>
+                  <a:srgbClr val="666666"/>
+                </a:solidFill>
+                <a:latin typeface="Poppins"/>
               </a:rPr>
-              <a:t>Two keys go in your .env file: one answers questions, one searches your notes.</a:t>
-            </a:r>
-          </a:p>
-          <a:p>
-            <a:pPr algn="l">
-              <a:spcAft>
-                <a:spcPts val="1600"/>
-              </a:spcAft>
-            </a:pPr>
-            <a:r>
-              <a:rPr sz="1800">
-                <a:solidFill>
-                  <a:srgbClr val="3627FC"/>
-                </a:solidFill>
-                <a:latin typeface="Poppins SemiBold"/>
-              </a:rPr>
-              <a:t>Pick the kernel in every notebook you open. This is the #1 source of errors all workshop.</a:t>
+              <a:t>And when you ask something your notes do not cover, it will say so instead of guessing. Getting a computer to admit what it does not know is the hard part.</a:t>
             </a:r>
           </a:p>
         </p:txBody>
@@ -9824,8 +11798,8 @@
         </p:nvSpPr>
         <p:spPr>
           <a:xfrm>
-            <a:off x="0" y="0"/>
-            <a:ext cx="9144000" cy="10287000"/>
+            <a:off x="0" y="54864"/>
+            <a:ext cx="18288000" cy="2084831"/>
           </a:xfrm>
           <a:prstGeom prst="rect">
             <a:avLst/>
@@ -9868,8 +11842,131 @@
         </p:nvSpPr>
         <p:spPr>
           <a:xfrm>
-            <a:off x="10058400" y="3849624"/>
-            <a:ext cx="5961888" cy="548640"/>
+            <a:off x="3438144" y="667512"/>
+            <a:ext cx="11420856" cy="822960"/>
+          </a:xfrm>
+          <a:prstGeom prst="rect">
+            <a:avLst/>
+          </a:prstGeom>
+          <a:noFill/>
+        </p:spPr>
+        <p:txBody>
+          <a:bodyPr wrap="square">
+            <a:spAutoFit/>
+          </a:bodyPr>
+          <a:lstStyle/>
+          <a:p>
+            <a:pPr algn="ctr"/>
+            <a:r>
+              <a:rPr sz="5200">
+                <a:solidFill>
+                  <a:srgbClr val="3627FC"/>
+                </a:solidFill>
+                <a:latin typeface="Poppins ExtraBold"/>
+              </a:rPr>
+              <a:t>Today</a:t>
+            </a:r>
+          </a:p>
+        </p:txBody>
+      </p:sp>
+      <p:sp>
+        <p:nvSpPr>
+          <p:cNvPr id="4" name="Rectangle 3"/>
+          <p:cNvSpPr/>
+          <p:nvPr/>
+        </p:nvSpPr>
+        <p:spPr>
+          <a:xfrm>
+            <a:off x="941832" y="3008376"/>
+            <a:ext cx="8083296" cy="3017520"/>
+          </a:xfrm>
+          <a:prstGeom prst="rect">
+            <a:avLst/>
+          </a:prstGeom>
+          <a:solidFill>
+            <a:srgbClr val="31C59E"/>
+          </a:solidFill>
+          <a:ln>
+            <a:noFill/>
+          </a:ln>
+          <a:effectLst/>
+        </p:spPr>
+        <p:style>
+          <a:lnRef idx="1">
+            <a:schemeClr val="accent1"/>
+          </a:lnRef>
+          <a:fillRef idx="3">
+            <a:schemeClr val="accent1"/>
+          </a:fillRef>
+          <a:effectRef idx="2">
+            <a:schemeClr val="accent1"/>
+          </a:effectRef>
+          <a:fontRef idx="minor">
+            <a:schemeClr val="lt1"/>
+          </a:fontRef>
+        </p:style>
+        <p:txBody>
+          <a:bodyPr rtlCol="0" anchor="ctr"/>
+          <a:lstStyle/>
+          <a:p>
+            <a:pPr algn="ctr"/>
+          </a:p>
+        </p:txBody>
+      </p:sp>
+      <p:sp>
+        <p:nvSpPr>
+          <p:cNvPr id="5" name="Rectangle 4"/>
+          <p:cNvSpPr/>
+          <p:nvPr/>
+        </p:nvSpPr>
+        <p:spPr>
+          <a:xfrm>
+            <a:off x="832104" y="2907792"/>
+            <a:ext cx="8083296" cy="3017520"/>
+          </a:xfrm>
+          <a:prstGeom prst="rect">
+            <a:avLst/>
+          </a:prstGeom>
+          <a:solidFill>
+            <a:srgbClr val="FFFFFF"/>
+          </a:solidFill>
+          <a:ln>
+            <a:noFill/>
+          </a:ln>
+          <a:effectLst/>
+        </p:spPr>
+        <p:style>
+          <a:lnRef idx="1">
+            <a:schemeClr val="accent1"/>
+          </a:lnRef>
+          <a:fillRef idx="3">
+            <a:schemeClr val="accent1"/>
+          </a:fillRef>
+          <a:effectRef idx="2">
+            <a:schemeClr val="accent1"/>
+          </a:effectRef>
+          <a:fontRef idx="minor">
+            <a:schemeClr val="lt1"/>
+          </a:fontRef>
+        </p:style>
+        <p:txBody>
+          <a:bodyPr rtlCol="0" anchor="ctr"/>
+          <a:lstStyle/>
+          <a:p>
+            <a:pPr algn="ctr"/>
+          </a:p>
+        </p:txBody>
+      </p:sp>
+      <p:sp>
+        <p:nvSpPr>
+          <p:cNvPr id="6" name="TextBox 5"/>
+          <p:cNvSpPr txBox="1"/>
+          <p:nvPr/>
+        </p:nvSpPr>
+        <p:spPr>
+          <a:xfrm>
+            <a:off x="2221991" y="3648456"/>
+            <a:ext cx="6035040" cy="640080"/>
           </a:xfrm>
           <a:prstGeom prst="rect">
             <a:avLst/>
@@ -9884,27 +11981,27 @@
           <a:p>
             <a:pPr algn="l"/>
             <a:r>
-              <a:rPr sz="3100">
-                <a:solidFill>
-                  <a:srgbClr val="666666"/>
-                </a:solidFill>
-                <a:latin typeface="Poppins Medium"/>
+              <a:rPr sz="3200">
+                <a:solidFill>
+                  <a:srgbClr val="434343"/>
+                </a:solidFill>
+                <a:latin typeface="Poppins ExtraBold"/>
               </a:rPr>
-              <a:t>Step 3</a:t>
+              <a:t>Set up</a:t>
             </a:r>
           </a:p>
         </p:txBody>
       </p:sp>
       <p:sp>
         <p:nvSpPr>
-          <p:cNvPr id="4" name="TextBox 3"/>
+          <p:cNvPr id="7" name="TextBox 6"/>
           <p:cNvSpPr txBox="1"/>
           <p:nvPr/>
         </p:nvSpPr>
         <p:spPr>
           <a:xfrm>
-            <a:off x="10058400" y="4572000"/>
-            <a:ext cx="7754112" cy="1828800"/>
+            <a:off x="2221991" y="4471416"/>
+            <a:ext cx="5486400" cy="1280160"/>
           </a:xfrm>
           <a:prstGeom prst="rect">
             <a:avLst/>
@@ -9919,9 +12016,290 @@
           <a:p>
             <a:pPr algn="l"/>
             <a:r>
-              <a:rPr sz="5000">
-                <a:solidFill>
-                  <a:srgbClr val="3627FC"/>
+              <a:rPr sz="1800">
+                <a:solidFill>
+                  <a:srgbClr val="434343"/>
+                </a:solidFill>
+                <a:latin typeface="Poppins"/>
+              </a:rPr>
+              <a:t>Python, VS Code and your keys. Your work lives in your shared folder.</a:t>
+            </a:r>
+          </a:p>
+        </p:txBody>
+      </p:sp>
+      <p:sp>
+        <p:nvSpPr>
+          <p:cNvPr id="8" name="Rectangle 7"/>
+          <p:cNvSpPr/>
+          <p:nvPr/>
+        </p:nvSpPr>
+        <p:spPr>
+          <a:xfrm>
+            <a:off x="9372600" y="3008376"/>
+            <a:ext cx="8083296" cy="3017520"/>
+          </a:xfrm>
+          <a:prstGeom prst="rect">
+            <a:avLst/>
+          </a:prstGeom>
+          <a:solidFill>
+            <a:srgbClr val="31C59E"/>
+          </a:solidFill>
+          <a:ln>
+            <a:noFill/>
+          </a:ln>
+          <a:effectLst/>
+        </p:spPr>
+        <p:style>
+          <a:lnRef idx="1">
+            <a:schemeClr val="accent1"/>
+          </a:lnRef>
+          <a:fillRef idx="3">
+            <a:schemeClr val="accent1"/>
+          </a:fillRef>
+          <a:effectRef idx="2">
+            <a:schemeClr val="accent1"/>
+          </a:effectRef>
+          <a:fontRef idx="minor">
+            <a:schemeClr val="lt1"/>
+          </a:fontRef>
+        </p:style>
+        <p:txBody>
+          <a:bodyPr rtlCol="0" anchor="ctr"/>
+          <a:lstStyle/>
+          <a:p>
+            <a:pPr algn="ctr"/>
+          </a:p>
+        </p:txBody>
+      </p:sp>
+      <p:sp>
+        <p:nvSpPr>
+          <p:cNvPr id="9" name="Rectangle 8"/>
+          <p:cNvSpPr/>
+          <p:nvPr/>
+        </p:nvSpPr>
+        <p:spPr>
+          <a:xfrm>
+            <a:off x="9262872" y="2907792"/>
+            <a:ext cx="8083296" cy="3017520"/>
+          </a:xfrm>
+          <a:prstGeom prst="rect">
+            <a:avLst/>
+          </a:prstGeom>
+          <a:solidFill>
+            <a:srgbClr val="FFFFFF"/>
+          </a:solidFill>
+          <a:ln>
+            <a:noFill/>
+          </a:ln>
+          <a:effectLst/>
+        </p:spPr>
+        <p:style>
+          <a:lnRef idx="1">
+            <a:schemeClr val="accent1"/>
+          </a:lnRef>
+          <a:fillRef idx="3">
+            <a:schemeClr val="accent1"/>
+          </a:fillRef>
+          <a:effectRef idx="2">
+            <a:schemeClr val="accent1"/>
+          </a:effectRef>
+          <a:fontRef idx="minor">
+            <a:schemeClr val="lt1"/>
+          </a:fontRef>
+        </p:style>
+        <p:txBody>
+          <a:bodyPr rtlCol="0" anchor="ctr"/>
+          <a:lstStyle/>
+          <a:p>
+            <a:pPr algn="ctr"/>
+          </a:p>
+        </p:txBody>
+      </p:sp>
+      <p:sp>
+        <p:nvSpPr>
+          <p:cNvPr id="10" name="TextBox 9"/>
+          <p:cNvSpPr txBox="1"/>
+          <p:nvPr/>
+        </p:nvSpPr>
+        <p:spPr>
+          <a:xfrm>
+            <a:off x="10652760" y="3648456"/>
+            <a:ext cx="6035040" cy="640080"/>
+          </a:xfrm>
+          <a:prstGeom prst="rect">
+            <a:avLst/>
+          </a:prstGeom>
+          <a:noFill/>
+        </p:spPr>
+        <p:txBody>
+          <a:bodyPr wrap="square">
+            <a:spAutoFit/>
+          </a:bodyPr>
+          <a:lstStyle/>
+          <a:p>
+            <a:pPr algn="l"/>
+            <a:r>
+              <a:rPr sz="3200">
+                <a:solidFill>
+                  <a:srgbClr val="434343"/>
+                </a:solidFill>
+                <a:latin typeface="Poppins ExtraBold"/>
+              </a:rPr>
+              <a:t>First AI call</a:t>
+            </a:r>
+          </a:p>
+        </p:txBody>
+      </p:sp>
+      <p:sp>
+        <p:nvSpPr>
+          <p:cNvPr id="11" name="TextBox 10"/>
+          <p:cNvSpPr txBox="1"/>
+          <p:nvPr/>
+        </p:nvSpPr>
+        <p:spPr>
+          <a:xfrm>
+            <a:off x="10652760" y="4471416"/>
+            <a:ext cx="5486400" cy="1280160"/>
+          </a:xfrm>
+          <a:prstGeom prst="rect">
+            <a:avLst/>
+          </a:prstGeom>
+          <a:noFill/>
+        </p:spPr>
+        <p:txBody>
+          <a:bodyPr wrap="square">
+            <a:spAutoFit/>
+          </a:bodyPr>
+          <a:lstStyle/>
+          <a:p>
+            <a:pPr algn="l"/>
+            <a:r>
+              <a:rPr sz="1800">
+                <a:solidFill>
+                  <a:srgbClr val="434343"/>
+                </a:solidFill>
+                <a:latin typeface="Poppins"/>
+              </a:rPr>
+              <a:t>Send a message to Claude and look at what actually comes back.</a:t>
+            </a:r>
+          </a:p>
+        </p:txBody>
+      </p:sp>
+      <p:sp>
+        <p:nvSpPr>
+          <p:cNvPr id="12" name="Rectangle 11"/>
+          <p:cNvSpPr/>
+          <p:nvPr/>
+        </p:nvSpPr>
+        <p:spPr>
+          <a:xfrm>
+            <a:off x="941832" y="6428232"/>
+            <a:ext cx="8083296" cy="3017520"/>
+          </a:xfrm>
+          <a:prstGeom prst="rect">
+            <a:avLst/>
+          </a:prstGeom>
+          <a:solidFill>
+            <a:srgbClr val="31C59E"/>
+          </a:solidFill>
+          <a:ln>
+            <a:noFill/>
+          </a:ln>
+          <a:effectLst/>
+        </p:spPr>
+        <p:style>
+          <a:lnRef idx="1">
+            <a:schemeClr val="accent1"/>
+          </a:lnRef>
+          <a:fillRef idx="3">
+            <a:schemeClr val="accent1"/>
+          </a:fillRef>
+          <a:effectRef idx="2">
+            <a:schemeClr val="accent1"/>
+          </a:effectRef>
+          <a:fontRef idx="minor">
+            <a:schemeClr val="lt1"/>
+          </a:fontRef>
+        </p:style>
+        <p:txBody>
+          <a:bodyPr rtlCol="0" anchor="ctr"/>
+          <a:lstStyle/>
+          <a:p>
+            <a:pPr algn="ctr"/>
+          </a:p>
+        </p:txBody>
+      </p:sp>
+      <p:sp>
+        <p:nvSpPr>
+          <p:cNvPr id="13" name="Rectangle 12"/>
+          <p:cNvSpPr/>
+          <p:nvPr/>
+        </p:nvSpPr>
+        <p:spPr>
+          <a:xfrm>
+            <a:off x="832104" y="6327648"/>
+            <a:ext cx="8083296" cy="3017520"/>
+          </a:xfrm>
+          <a:prstGeom prst="rect">
+            <a:avLst/>
+          </a:prstGeom>
+          <a:solidFill>
+            <a:srgbClr val="FFFFFF"/>
+          </a:solidFill>
+          <a:ln>
+            <a:noFill/>
+          </a:ln>
+          <a:effectLst/>
+        </p:spPr>
+        <p:style>
+          <a:lnRef idx="1">
+            <a:schemeClr val="accent1"/>
+          </a:lnRef>
+          <a:fillRef idx="3">
+            <a:schemeClr val="accent1"/>
+          </a:fillRef>
+          <a:effectRef idx="2">
+            <a:schemeClr val="accent1"/>
+          </a:effectRef>
+          <a:fontRef idx="minor">
+            <a:schemeClr val="lt1"/>
+          </a:fontRef>
+        </p:style>
+        <p:txBody>
+          <a:bodyPr rtlCol="0" anchor="ctr"/>
+          <a:lstStyle/>
+          <a:p>
+            <a:pPr algn="ctr"/>
+          </a:p>
+        </p:txBody>
+      </p:sp>
+      <p:sp>
+        <p:nvSpPr>
+          <p:cNvPr id="14" name="TextBox 13"/>
+          <p:cNvSpPr txBox="1"/>
+          <p:nvPr/>
+        </p:nvSpPr>
+        <p:spPr>
+          <a:xfrm>
+            <a:off x="2221991" y="7068312"/>
+            <a:ext cx="6035040" cy="640080"/>
+          </a:xfrm>
+          <a:prstGeom prst="rect">
+            <a:avLst/>
+          </a:prstGeom>
+          <a:noFill/>
+        </p:spPr>
+        <p:txBody>
+          <a:bodyPr wrap="square">
+            <a:spAutoFit/>
+          </a:bodyPr>
+          <a:lstStyle/>
+          <a:p>
+            <a:pPr algn="l"/>
+            <a:r>
+              <a:rPr sz="3200">
+                <a:solidFill>
+                  <a:srgbClr val="434343"/>
                 </a:solidFill>
                 <a:latin typeface="Poppins ExtraBold"/>
               </a:rPr>
@@ -9932,14 +12310,14 @@
       </p:sp>
       <p:sp>
         <p:nvSpPr>
-          <p:cNvPr id="5" name="TextBox 4"/>
+          <p:cNvPr id="15" name="TextBox 14"/>
           <p:cNvSpPr txBox="1"/>
           <p:nvPr/>
         </p:nvSpPr>
         <p:spPr>
           <a:xfrm>
-            <a:off x="1005840" y="3108960"/>
-            <a:ext cx="7242048" cy="4572000"/>
+            <a:off x="2221991" y="7891272"/>
+            <a:ext cx="5486400" cy="1280160"/>
           </a:xfrm>
           <a:prstGeom prst="rect">
             <a:avLst/>
@@ -9952,51 +12330,173 @@
           </a:bodyPr>
           <a:lstStyle/>
           <a:p>
-            <a:pPr algn="l">
-              <a:spcAft>
-                <a:spcPts val="1600"/>
-              </a:spcAft>
-            </a:pPr>
+            <a:pPr algn="l"/>
             <a:r>
               <a:rPr sz="1800">
                 <a:solidFill>
-                  <a:srgbClr val="3627FC"/>
-                </a:solidFill>
-                <a:latin typeface="Poppins SemiBold"/>
+                  <a:srgbClr val="434343"/>
+                </a:solidFill>
+                <a:latin typeface="Poppins"/>
               </a:rPr>
-              <a:t>Every message has a role. SYSTEM is written by you, the programmer, and the user never sees it. HUMAN is what the user typed.</a:t>
+              <a:t>Give the model a job. One question, three different assistants.</a:t>
             </a:r>
           </a:p>
+        </p:txBody>
+      </p:sp>
+      <p:sp>
+        <p:nvSpPr>
+          <p:cNvPr id="16" name="Rectangle 15"/>
+          <p:cNvSpPr/>
+          <p:nvPr/>
+        </p:nvSpPr>
+        <p:spPr>
+          <a:xfrm>
+            <a:off x="9372600" y="6428232"/>
+            <a:ext cx="8083296" cy="3017520"/>
+          </a:xfrm>
+          <a:prstGeom prst="rect">
+            <a:avLst/>
+          </a:prstGeom>
+          <a:solidFill>
+            <a:srgbClr val="31C59E"/>
+          </a:solidFill>
+          <a:ln>
+            <a:noFill/>
+          </a:ln>
+          <a:effectLst/>
+        </p:spPr>
+        <p:style>
+          <a:lnRef idx="1">
+            <a:schemeClr val="accent1"/>
+          </a:lnRef>
+          <a:fillRef idx="3">
+            <a:schemeClr val="accent1"/>
+          </a:fillRef>
+          <a:effectRef idx="2">
+            <a:schemeClr val="accent1"/>
+          </a:effectRef>
+          <a:fontRef idx="minor">
+            <a:schemeClr val="lt1"/>
+          </a:fontRef>
+        </p:style>
+        <p:txBody>
+          <a:bodyPr rtlCol="0" anchor="ctr"/>
+          <a:lstStyle/>
           <a:p>
-            <a:pPr algn="l">
-              <a:spcAft>
-                <a:spcPts val="1600"/>
-              </a:spcAft>
-            </a:pPr>
+            <a:pPr algn="ctr"/>
+          </a:p>
+        </p:txBody>
+      </p:sp>
+      <p:sp>
+        <p:nvSpPr>
+          <p:cNvPr id="17" name="Rectangle 16"/>
+          <p:cNvSpPr/>
+          <p:nvPr/>
+        </p:nvSpPr>
+        <p:spPr>
+          <a:xfrm>
+            <a:off x="9262872" y="6327648"/>
+            <a:ext cx="8083296" cy="3017520"/>
+          </a:xfrm>
+          <a:prstGeom prst="rect">
+            <a:avLst/>
+          </a:prstGeom>
+          <a:solidFill>
+            <a:srgbClr val="FFFFFF"/>
+          </a:solidFill>
+          <a:ln>
+            <a:noFill/>
+          </a:ln>
+          <a:effectLst/>
+        </p:spPr>
+        <p:style>
+          <a:lnRef idx="1">
+            <a:schemeClr val="accent1"/>
+          </a:lnRef>
+          <a:fillRef idx="3">
+            <a:schemeClr val="accent1"/>
+          </a:fillRef>
+          <a:effectRef idx="2">
+            <a:schemeClr val="accent1"/>
+          </a:effectRef>
+          <a:fontRef idx="minor">
+            <a:schemeClr val="lt1"/>
+          </a:fontRef>
+        </p:style>
+        <p:txBody>
+          <a:bodyPr rtlCol="0" anchor="ctr"/>
+          <a:lstStyle/>
+          <a:p>
+            <a:pPr algn="ctr"/>
+          </a:p>
+        </p:txBody>
+      </p:sp>
+      <p:sp>
+        <p:nvSpPr>
+          <p:cNvPr id="18" name="TextBox 17"/>
+          <p:cNvSpPr txBox="1"/>
+          <p:nvPr/>
+        </p:nvSpPr>
+        <p:spPr>
+          <a:xfrm>
+            <a:off x="10652760" y="7068312"/>
+            <a:ext cx="6035040" cy="640080"/>
+          </a:xfrm>
+          <a:prstGeom prst="rect">
+            <a:avLst/>
+          </a:prstGeom>
+          <a:noFill/>
+        </p:spPr>
+        <p:txBody>
+          <a:bodyPr wrap="square">
+            <a:spAutoFit/>
+          </a:bodyPr>
+          <a:lstStyle/>
+          <a:p>
+            <a:pPr algn="l"/>
+            <a:r>
+              <a:rPr sz="3200">
+                <a:solidFill>
+                  <a:srgbClr val="434343"/>
+                </a:solidFill>
+                <a:latin typeface="Poppins ExtraBold"/>
+              </a:rPr>
+              <a:t>Make it obey</a:t>
+            </a:r>
+          </a:p>
+        </p:txBody>
+      </p:sp>
+      <p:sp>
+        <p:nvSpPr>
+          <p:cNvPr id="19" name="TextBox 18"/>
+          <p:cNvSpPr txBox="1"/>
+          <p:nvPr/>
+        </p:nvSpPr>
+        <p:spPr>
+          <a:xfrm>
+            <a:off x="10652760" y="7891272"/>
+            <a:ext cx="5486400" cy="1280160"/>
+          </a:xfrm>
+          <a:prstGeom prst="rect">
+            <a:avLst/>
+          </a:prstGeom>
+          <a:noFill/>
+        </p:spPr>
+        <p:txBody>
+          <a:bodyPr wrap="square">
+            <a:spAutoFit/>
+          </a:bodyPr>
+          <a:lstStyle/>
+          <a:p>
+            <a:pPr algn="l"/>
             <a:r>
               <a:rPr sz="1800">
                 <a:solidFill>
-                  <a:srgbClr val="3627FC"/>
-                </a:solidFill>
-                <a:latin typeface="Poppins SemiBold"/>
+                  <a:srgbClr val="434343"/>
+                </a:solidFill>
+                <a:latin typeface="Poppins"/>
               </a:rPr>
-              <a:t>That separation is why a chatbot stays polite no matter what you type at it.</a:t>
-            </a:r>
-          </a:p>
-          <a:p>
-            <a:pPr algn="l">
-              <a:spcAft>
-                <a:spcPts val="1600"/>
-              </a:spcAft>
-            </a:pPr>
-            <a:r>
-              <a:rPr sz="1800">
-                <a:solidFill>
-                  <a:srgbClr val="3627FC"/>
-                </a:solidFill>
-                <a:latin typeface="Poppins SemiBold"/>
-              </a:rPr>
-              <a:t>Same model, same question, three different system prompts - three completely different assistants.</a:t>
+              <a:t>Control length, format and language - then make it refuse.</a:t>
             </a:r>
           </a:p>
         </p:txBody>
@@ -10021,14 +12521,58 @@
       <p:grpSpPr/>
       <p:sp>
         <p:nvSpPr>
-          <p:cNvPr id="2" name="TextBox 1"/>
+          <p:cNvPr id="2" name="Rectangle 1"/>
+          <p:cNvSpPr/>
+          <p:nvPr/>
+        </p:nvSpPr>
+        <p:spPr>
+          <a:xfrm>
+            <a:off x="9144000" y="0"/>
+            <a:ext cx="9144000" cy="10287000"/>
+          </a:xfrm>
+          <a:prstGeom prst="rect">
+            <a:avLst/>
+          </a:prstGeom>
+          <a:solidFill>
+            <a:srgbClr val="F3F3F3"/>
+          </a:solidFill>
+          <a:ln>
+            <a:noFill/>
+          </a:ln>
+          <a:effectLst/>
+        </p:spPr>
+        <p:style>
+          <a:lnRef idx="1">
+            <a:schemeClr val="accent1"/>
+          </a:lnRef>
+          <a:fillRef idx="3">
+            <a:schemeClr val="accent1"/>
+          </a:fillRef>
+          <a:effectRef idx="2">
+            <a:schemeClr val="accent1"/>
+          </a:effectRef>
+          <a:fontRef idx="minor">
+            <a:schemeClr val="lt1"/>
+          </a:fontRef>
+        </p:style>
+        <p:txBody>
+          <a:bodyPr rtlCol="0" anchor="ctr"/>
+          <a:lstStyle/>
+          <a:p>
+            <a:pPr algn="ctr"/>
+          </a:p>
+        </p:txBody>
+      </p:sp>
+      <p:sp>
+        <p:nvSpPr>
+          <p:cNvPr id="3" name="TextBox 2"/>
           <p:cNvSpPr txBox="1"/>
           <p:nvPr/>
         </p:nvSpPr>
         <p:spPr>
           <a:xfrm>
-            <a:off x="1828800" y="3657600"/>
-            <a:ext cx="14630400" cy="2743200"/>
+            <a:off x="1069848" y="3849624"/>
+            <a:ext cx="5961888" cy="548640"/>
           </a:xfrm>
           <a:prstGeom prst="rect">
             <a:avLst/>
@@ -10041,29 +12585,29 @@
           </a:bodyPr>
           <a:lstStyle/>
           <a:p>
-            <a:pPr algn="ctr"/>
+            <a:pPr algn="l"/>
             <a:r>
-              <a:rPr sz="4400">
-                <a:solidFill>
-                  <a:srgbClr val="3627FC"/>
-                </a:solidFill>
-                <a:latin typeface="Poppins ExtraBold"/>
+              <a:rPr sz="3100">
+                <a:solidFill>
+                  <a:srgbClr val="666666"/>
+                </a:solidFill>
+                <a:latin typeface="Poppins Medium"/>
               </a:rPr>
-              <a:t>“I only answer questions about weather.”</a:t>
+              <a:t>Step 1</a:t>
             </a:r>
           </a:p>
         </p:txBody>
       </p:sp>
       <p:sp>
         <p:nvSpPr>
-          <p:cNvPr id="3" name="TextBox 2"/>
+          <p:cNvPr id="4" name="TextBox 3"/>
           <p:cNvSpPr txBox="1"/>
           <p:nvPr/>
         </p:nvSpPr>
         <p:spPr>
           <a:xfrm>
-            <a:off x="2743200" y="6949440"/>
-            <a:ext cx="12801600" cy="731520"/>
+            <a:off x="1069848" y="4572000"/>
+            <a:ext cx="7754112" cy="1828800"/>
           </a:xfrm>
           <a:prstGeom prst="rect">
             <a:avLst/>
@@ -10076,15 +12620,102 @@
           </a:bodyPr>
           <a:lstStyle/>
           <a:p>
-            <a:pPr algn="ctr"/>
+            <a:pPr algn="l"/>
             <a:r>
-              <a:rPr sz="2200">
-                <a:solidFill>
-                  <a:srgbClr val="666666"/>
-                </a:solidFill>
-                <a:latin typeface="Poppins"/>
+              <a:rPr sz="5000">
+                <a:solidFill>
+                  <a:srgbClr val="3627FC"/>
+                </a:solidFill>
+                <a:latin typeface="Poppins ExtraBold"/>
               </a:rPr>
-              <a:t>One paragraph of English turned a confident liar into something you can trust.</a:t>
+              <a:t>Setup</a:t>
+            </a:r>
+          </a:p>
+        </p:txBody>
+      </p:sp>
+      <p:sp>
+        <p:nvSpPr>
+          <p:cNvPr id="5" name="TextBox 4"/>
+          <p:cNvSpPr txBox="1"/>
+          <p:nvPr/>
+        </p:nvSpPr>
+        <p:spPr>
+          <a:xfrm>
+            <a:off x="9985248" y="3108960"/>
+            <a:ext cx="7242048" cy="4572000"/>
+          </a:xfrm>
+          <a:prstGeom prst="rect">
+            <a:avLst/>
+          </a:prstGeom>
+          <a:noFill/>
+        </p:spPr>
+        <p:txBody>
+          <a:bodyPr wrap="square">
+            <a:spAutoFit/>
+          </a:bodyPr>
+          <a:lstStyle/>
+          <a:p>
+            <a:pPr algn="l">
+              <a:spcAft>
+                <a:spcPts val="1600"/>
+              </a:spcAft>
+            </a:pPr>
+            <a:r>
+              <a:rPr sz="1800">
+                <a:solidFill>
+                  <a:srgbClr val="3627FC"/>
+                </a:solidFill>
+                <a:latin typeface="Poppins SemiBold"/>
+              </a:rPr>
+              <a:t>Everything is already installed - you are connecting pieces, not installing them.</a:t>
+            </a:r>
+          </a:p>
+          <a:p>
+            <a:pPr algn="l">
+              <a:spcAft>
+                <a:spcPts val="1600"/>
+              </a:spcAft>
+            </a:pPr>
+            <a:r>
+              <a:rPr sz="1800">
+                <a:solidFill>
+                  <a:srgbClr val="3627FC"/>
+                </a:solidFill>
+                <a:latin typeface="Poppins SemiBold"/>
+              </a:rPr>
+              <a:t>Python lives on the laptop. YOUR WORK lives in your shared folder, because you may be at a different Mac next lesson.</a:t>
+            </a:r>
+          </a:p>
+          <a:p>
+            <a:pPr algn="l">
+              <a:spcAft>
+                <a:spcPts val="1600"/>
+              </a:spcAft>
+            </a:pPr>
+            <a:r>
+              <a:rPr sz="1800">
+                <a:solidFill>
+                  <a:srgbClr val="3627FC"/>
+                </a:solidFill>
+                <a:latin typeface="Poppins SemiBold"/>
+              </a:rPr>
+              <a:t>Two keys go in your .env file: one answers questions, one searches your notes.</a:t>
+            </a:r>
+          </a:p>
+          <a:p>
+            <a:pPr algn="l">
+              <a:spcAft>
+                <a:spcPts val="1600"/>
+              </a:spcAft>
+            </a:pPr>
+            <a:r>
+              <a:rPr sz="1800">
+                <a:solidFill>
+                  <a:srgbClr val="3627FC"/>
+                </a:solidFill>
+                <a:latin typeface="Poppins SemiBold"/>
+              </a:rPr>
+              <a:t>Pick the kernel in every notebook you open. This is the #1 source of errors all workshop.</a:t>
             </a:r>
           </a:p>
         </p:txBody>
@@ -10115,7 +12746,7 @@
         </p:nvSpPr>
         <p:spPr>
           <a:xfrm>
-            <a:off x="9144000" y="0"/>
+            <a:off x="0" y="0"/>
             <a:ext cx="9144000" cy="10287000"/>
           </a:xfrm>
           <a:prstGeom prst="rect">
@@ -10159,7 +12790,7 @@
         </p:nvSpPr>
         <p:spPr>
           <a:xfrm>
-            <a:off x="1069848" y="3849624"/>
+            <a:off x="10058400" y="3849624"/>
             <a:ext cx="5961888" cy="548640"/>
           </a:xfrm>
           <a:prstGeom prst="rect">
@@ -10181,7 +12812,7 @@
                 </a:solidFill>
                 <a:latin typeface="Poppins Medium"/>
               </a:rPr>
-              <a:t>Homework</a:t>
+              <a:t>Step 3</a:t>
             </a:r>
           </a:p>
         </p:txBody>
@@ -10194,7 +12825,7 @@
         </p:nvSpPr>
         <p:spPr>
           <a:xfrm>
-            <a:off x="1069848" y="4572000"/>
+            <a:off x="10058400" y="4572000"/>
             <a:ext cx="7754112" cy="1828800"/>
           </a:xfrm>
           <a:prstGeom prst="rect">
@@ -10216,7 +12847,7 @@
                 </a:solidFill>
                 <a:latin typeface="Poppins ExtraBold"/>
               </a:rPr>
-              <a:t>Bring your own notes</a:t>
+              <a:t>System prompts</a:t>
             </a:r>
           </a:p>
         </p:txBody>
@@ -10229,7 +12860,7 @@
         </p:nvSpPr>
         <p:spPr>
           <a:xfrm>
-            <a:off x="9985248" y="3108960"/>
+            <a:off x="1005840" y="3108960"/>
             <a:ext cx="7242048" cy="4572000"/>
           </a:xfrm>
           <a:prstGeom prst="rect">
@@ -10255,7 +12886,7 @@
                 </a:solidFill>
                 <a:latin typeface="Poppins SemiBold"/>
               </a:rPr>
-              <a:t>3 to 10 of your own .txt or .md files.</a:t>
+              <a:t>Every message has a role. SYSTEM is written by you, the programmer, and the user never sees it. HUMAN is what the user typed.</a:t>
             </a:r>
           </a:p>
           <a:p>
@@ -10271,7 +12902,7 @@
                 </a:solidFill>
                 <a:latin typeface="Poppins SemiBold"/>
               </a:rPr>
-              <a:t>Revision notes, a subject you study, the rules of a game you play, a wiki you exported. Armenian, English or both.</a:t>
+              <a:t>That separation is why a chatbot stays polite no matter what you type at it.</a:t>
             </a:r>
           </a:p>
           <a:p>
@@ -10287,7 +12918,95 @@
                 </a:solidFill>
                 <a:latin typeface="Poppins SemiBold"/>
               </a:rPr>
-              <a:t>Shared storage is visible to everyone - bring notes on a general subject, and keep personal things out of the workshop folder.</a:t>
+              <a:t>Same model, same question, three different system prompts - three completely different assistants.</a:t>
+            </a:r>
+          </a:p>
+        </p:txBody>
+      </p:sp>
+    </p:spTree>
+  </p:cSld>
+  <p:clrMapOvr>
+    <a:masterClrMapping/>
+  </p:clrMapOvr>
+</p:sld>
+</file>
+
+<file path=ppt/slides/slide9.xml><?xml version="1.0" encoding="utf-8"?>
+<p:sld xmlns:a="http://schemas.openxmlformats.org/drawingml/2006/main" xmlns:p="http://schemas.openxmlformats.org/presentationml/2006/main" xmlns:r="http://schemas.openxmlformats.org/officeDocument/2006/relationships">
+  <p:cSld>
+    <p:spTree>
+      <p:nvGrpSpPr>
+        <p:cNvPr id="1" name=""/>
+        <p:cNvGrpSpPr/>
+        <p:nvPr/>
+      </p:nvGrpSpPr>
+      <p:grpSpPr/>
+      <p:sp>
+        <p:nvSpPr>
+          <p:cNvPr id="2" name="TextBox 1"/>
+          <p:cNvSpPr txBox="1"/>
+          <p:nvPr/>
+        </p:nvSpPr>
+        <p:spPr>
+          <a:xfrm>
+            <a:off x="1828800" y="3657600"/>
+            <a:ext cx="14630400" cy="2743200"/>
+          </a:xfrm>
+          <a:prstGeom prst="rect">
+            <a:avLst/>
+          </a:prstGeom>
+          <a:noFill/>
+        </p:spPr>
+        <p:txBody>
+          <a:bodyPr wrap="square">
+            <a:spAutoFit/>
+          </a:bodyPr>
+          <a:lstStyle/>
+          <a:p>
+            <a:pPr algn="ctr"/>
+            <a:r>
+              <a:rPr sz="4400">
+                <a:solidFill>
+                  <a:srgbClr val="3627FC"/>
+                </a:solidFill>
+                <a:latin typeface="Poppins ExtraBold"/>
+              </a:rPr>
+              <a:t>“I only answer questions about weather.”</a:t>
+            </a:r>
+          </a:p>
+        </p:txBody>
+      </p:sp>
+      <p:sp>
+        <p:nvSpPr>
+          <p:cNvPr id="3" name="TextBox 2"/>
+          <p:cNvSpPr txBox="1"/>
+          <p:nvPr/>
+        </p:nvSpPr>
+        <p:spPr>
+          <a:xfrm>
+            <a:off x="2743200" y="6949440"/>
+            <a:ext cx="12801600" cy="731520"/>
+          </a:xfrm>
+          <a:prstGeom prst="rect">
+            <a:avLst/>
+          </a:prstGeom>
+          <a:noFill/>
+        </p:spPr>
+        <p:txBody>
+          <a:bodyPr wrap="square">
+            <a:spAutoFit/>
+          </a:bodyPr>
+          <a:lstStyle/>
+          <a:p>
+            <a:pPr algn="ctr"/>
+            <a:r>
+              <a:rPr sz="2200">
+                <a:solidFill>
+                  <a:srgbClr val="666666"/>
+                </a:solidFill>
+                <a:latin typeface="Poppins"/>
+              </a:rPr>
+              <a:t>One paragraph of English turned a confident liar into something you can trust.</a:t>
             </a:r>
           </a:p>
         </p:txBody>

--- a/slides/Lesson 1 - Setup and Your First AI Call.pptx
+++ b/slides/Lesson 1 - Setup and Your First AI Call.pptx
@@ -9483,7 +9483,7 @@
                 </a:solidFill>
                 <a:latin typeface="Poppins ExtraBold"/>
               </a:rPr>
-              <a:t>Why AI lies</a:t>
+              <a:t>Why AI invents</a:t>
             </a:r>
           </a:p>
         </p:txBody>
@@ -9518,7 +9518,7 @@
                 </a:solidFill>
                 <a:latin typeface="Poppins"/>
               </a:rPr>
-              <a:t>Hallucination, and why pasting everything fails</a:t>
+              <a:t>Why it makes things up, and why pasting everything fails</a:t>
             </a:r>
           </a:p>
         </p:txBody>
@@ -11503,7 +11503,7 @@
                 </a:solidFill>
                 <a:latin typeface="Poppins"/>
               </a:rPr>
-              <a:t>2.  Why AI lies</a:t>
+              <a:t>2.  Why AI invents</a:t>
             </a:r>
           </a:p>
           <a:p>
@@ -11877,8 +11877,8 @@
         </p:nvSpPr>
         <p:spPr>
           <a:xfrm>
-            <a:off x="941832" y="3008376"/>
-            <a:ext cx="8083296" cy="3017520"/>
+            <a:off x="941831" y="3008376"/>
+            <a:ext cx="5236464" cy="3017520"/>
           </a:xfrm>
           <a:prstGeom prst="rect">
             <a:avLst/>
@@ -11921,8 +11921,8 @@
         </p:nvSpPr>
         <p:spPr>
           <a:xfrm>
-            <a:off x="832104" y="2907792"/>
-            <a:ext cx="8083296" cy="3017520"/>
+            <a:off x="832103" y="2907792"/>
+            <a:ext cx="5236464" cy="3017520"/>
           </a:xfrm>
           <a:prstGeom prst="rect">
             <a:avLst/>
@@ -11965,8 +11965,8 @@
         </p:nvSpPr>
         <p:spPr>
           <a:xfrm>
-            <a:off x="2221991" y="3648456"/>
-            <a:ext cx="6035040" cy="640080"/>
+            <a:off x="1490471" y="3557016"/>
+            <a:ext cx="4139183" cy="731520"/>
           </a:xfrm>
           <a:prstGeom prst="rect">
             <a:avLst/>
@@ -11981,7 +11981,7 @@
           <a:p>
             <a:pPr algn="l"/>
             <a:r>
-              <a:rPr sz="3200">
+              <a:rPr sz="2500">
                 <a:solidFill>
                   <a:srgbClr val="434343"/>
                 </a:solidFill>
@@ -12000,8 +12000,8 @@
         </p:nvSpPr>
         <p:spPr>
           <a:xfrm>
-            <a:off x="2221991" y="4471416"/>
-            <a:ext cx="5486400" cy="1280160"/>
+            <a:off x="1490471" y="4379976"/>
+            <a:ext cx="4139183" cy="1463040"/>
           </a:xfrm>
           <a:prstGeom prst="rect">
             <a:avLst/>
@@ -12016,7 +12016,7 @@
           <a:p>
             <a:pPr algn="l"/>
             <a:r>
-              <a:rPr sz="1800">
+              <a:rPr sz="1500">
                 <a:solidFill>
                   <a:srgbClr val="434343"/>
                 </a:solidFill>
@@ -12035,8 +12035,8 @@
         </p:nvSpPr>
         <p:spPr>
           <a:xfrm>
-            <a:off x="9372600" y="3008376"/>
-            <a:ext cx="8083296" cy="3017520"/>
+            <a:off x="6525767" y="3008376"/>
+            <a:ext cx="5236464" cy="3017520"/>
           </a:xfrm>
           <a:prstGeom prst="rect">
             <a:avLst/>
@@ -12079,8 +12079,8 @@
         </p:nvSpPr>
         <p:spPr>
           <a:xfrm>
-            <a:off x="9262872" y="2907792"/>
-            <a:ext cx="8083296" cy="3017520"/>
+            <a:off x="6416039" y="2907792"/>
+            <a:ext cx="5236464" cy="3017520"/>
           </a:xfrm>
           <a:prstGeom prst="rect">
             <a:avLst/>
@@ -12123,8 +12123,8 @@
         </p:nvSpPr>
         <p:spPr>
           <a:xfrm>
-            <a:off x="10652760" y="3648456"/>
-            <a:ext cx="6035040" cy="640080"/>
+            <a:off x="7074407" y="3557016"/>
+            <a:ext cx="4139183" cy="731520"/>
           </a:xfrm>
           <a:prstGeom prst="rect">
             <a:avLst/>
@@ -12139,7 +12139,7 @@
           <a:p>
             <a:pPr algn="l"/>
             <a:r>
-              <a:rPr sz="3200">
+              <a:rPr sz="2500">
                 <a:solidFill>
                   <a:srgbClr val="434343"/>
                 </a:solidFill>
@@ -12158,8 +12158,8 @@
         </p:nvSpPr>
         <p:spPr>
           <a:xfrm>
-            <a:off x="10652760" y="4471416"/>
-            <a:ext cx="5486400" cy="1280160"/>
+            <a:off x="7074407" y="4379976"/>
+            <a:ext cx="4139183" cy="1463040"/>
           </a:xfrm>
           <a:prstGeom prst="rect">
             <a:avLst/>
@@ -12174,13 +12174,13 @@
           <a:p>
             <a:pPr algn="l"/>
             <a:r>
-              <a:rPr sz="1800">
+              <a:rPr sz="1500">
                 <a:solidFill>
                   <a:srgbClr val="434343"/>
                 </a:solidFill>
                 <a:latin typeface="Poppins"/>
               </a:rPr>
-              <a:t>Send a message to Claude and look at what actually comes back.</a:t>
+              <a:t>Send a message to Claude, and look at what actually comes back.</a:t>
             </a:r>
           </a:p>
         </p:txBody>
@@ -12193,8 +12193,8 @@
         </p:nvSpPr>
         <p:spPr>
           <a:xfrm>
-            <a:off x="941832" y="6428232"/>
-            <a:ext cx="8083296" cy="3017520"/>
+            <a:off x="12109703" y="3008376"/>
+            <a:ext cx="5236464" cy="3017520"/>
           </a:xfrm>
           <a:prstGeom prst="rect">
             <a:avLst/>
@@ -12237,8 +12237,8 @@
         </p:nvSpPr>
         <p:spPr>
           <a:xfrm>
-            <a:off x="832104" y="6327648"/>
-            <a:ext cx="8083296" cy="3017520"/>
+            <a:off x="11999976" y="2907792"/>
+            <a:ext cx="5236464" cy="3017520"/>
           </a:xfrm>
           <a:prstGeom prst="rect">
             <a:avLst/>
@@ -12281,8 +12281,8 @@
         </p:nvSpPr>
         <p:spPr>
           <a:xfrm>
-            <a:off x="2221991" y="7068312"/>
-            <a:ext cx="6035040" cy="640080"/>
+            <a:off x="12658343" y="3557016"/>
+            <a:ext cx="4139183" cy="731520"/>
           </a:xfrm>
           <a:prstGeom prst="rect">
             <a:avLst/>
@@ -12297,7 +12297,7 @@
           <a:p>
             <a:pPr algn="l"/>
             <a:r>
-              <a:rPr sz="3200">
+              <a:rPr sz="2500">
                 <a:solidFill>
                   <a:srgbClr val="434343"/>
                 </a:solidFill>
@@ -12316,8 +12316,8 @@
         </p:nvSpPr>
         <p:spPr>
           <a:xfrm>
-            <a:off x="2221991" y="7891272"/>
-            <a:ext cx="5486400" cy="1280160"/>
+            <a:off x="12658343" y="4379976"/>
+            <a:ext cx="4139183" cy="1463040"/>
           </a:xfrm>
           <a:prstGeom prst="rect">
             <a:avLst/>
@@ -12332,7 +12332,7 @@
           <a:p>
             <a:pPr algn="l"/>
             <a:r>
-              <a:rPr sz="1800">
+              <a:rPr sz="1500">
                 <a:solidFill>
                   <a:srgbClr val="434343"/>
                 </a:solidFill>
@@ -12351,8 +12351,8 @@
         </p:nvSpPr>
         <p:spPr>
           <a:xfrm>
-            <a:off x="9372600" y="6428232"/>
-            <a:ext cx="8083296" cy="3017520"/>
+            <a:off x="3733799" y="6428232"/>
+            <a:ext cx="5236464" cy="3017520"/>
           </a:xfrm>
           <a:prstGeom prst="rect">
             <a:avLst/>
@@ -12395,8 +12395,8 @@
         </p:nvSpPr>
         <p:spPr>
           <a:xfrm>
-            <a:off x="9262872" y="6327648"/>
-            <a:ext cx="8083296" cy="3017520"/>
+            <a:off x="3624071" y="6327648"/>
+            <a:ext cx="5236464" cy="3017520"/>
           </a:xfrm>
           <a:prstGeom prst="rect">
             <a:avLst/>
@@ -12439,8 +12439,8 @@
         </p:nvSpPr>
         <p:spPr>
           <a:xfrm>
-            <a:off x="10652760" y="7068312"/>
-            <a:ext cx="6035040" cy="640080"/>
+            <a:off x="4282439" y="6976872"/>
+            <a:ext cx="4139183" cy="731520"/>
           </a:xfrm>
           <a:prstGeom prst="rect">
             <a:avLst/>
@@ -12455,7 +12455,7 @@
           <a:p>
             <a:pPr algn="l"/>
             <a:r>
-              <a:rPr sz="3200">
+              <a:rPr sz="2500">
                 <a:solidFill>
                   <a:srgbClr val="434343"/>
                 </a:solidFill>
@@ -12474,8 +12474,8 @@
         </p:nvSpPr>
         <p:spPr>
           <a:xfrm>
-            <a:off x="10652760" y="7891272"/>
-            <a:ext cx="5486400" cy="1280160"/>
+            <a:off x="4282439" y="7799832"/>
+            <a:ext cx="4139183" cy="1463040"/>
           </a:xfrm>
           <a:prstGeom prst="rect">
             <a:avLst/>
@@ -12490,13 +12490,171 @@
           <a:p>
             <a:pPr algn="l"/>
             <a:r>
-              <a:rPr sz="1800">
+              <a:rPr sz="1500">
                 <a:solidFill>
                   <a:srgbClr val="434343"/>
                 </a:solidFill>
                 <a:latin typeface="Poppins"/>
               </a:rPr>
               <a:t>Control length, format and language - then make it refuse.</a:t>
+            </a:r>
+          </a:p>
+        </p:txBody>
+      </p:sp>
+      <p:sp>
+        <p:nvSpPr>
+          <p:cNvPr id="20" name="Rectangle 19"/>
+          <p:cNvSpPr/>
+          <p:nvPr/>
+        </p:nvSpPr>
+        <p:spPr>
+          <a:xfrm>
+            <a:off x="9317736" y="6428232"/>
+            <a:ext cx="5236464" cy="3017520"/>
+          </a:xfrm>
+          <a:prstGeom prst="rect">
+            <a:avLst/>
+          </a:prstGeom>
+          <a:solidFill>
+            <a:srgbClr val="31C59E"/>
+          </a:solidFill>
+          <a:ln>
+            <a:noFill/>
+          </a:ln>
+          <a:effectLst/>
+        </p:spPr>
+        <p:style>
+          <a:lnRef idx="1">
+            <a:schemeClr val="accent1"/>
+          </a:lnRef>
+          <a:fillRef idx="3">
+            <a:schemeClr val="accent1"/>
+          </a:fillRef>
+          <a:effectRef idx="2">
+            <a:schemeClr val="accent1"/>
+          </a:effectRef>
+          <a:fontRef idx="minor">
+            <a:schemeClr val="lt1"/>
+          </a:fontRef>
+        </p:style>
+        <p:txBody>
+          <a:bodyPr rtlCol="0" anchor="ctr"/>
+          <a:lstStyle/>
+          <a:p>
+            <a:pPr algn="ctr"/>
+          </a:p>
+        </p:txBody>
+      </p:sp>
+      <p:sp>
+        <p:nvSpPr>
+          <p:cNvPr id="21" name="Rectangle 20"/>
+          <p:cNvSpPr/>
+          <p:nvPr/>
+        </p:nvSpPr>
+        <p:spPr>
+          <a:xfrm>
+            <a:off x="9208008" y="6327648"/>
+            <a:ext cx="5236464" cy="3017520"/>
+          </a:xfrm>
+          <a:prstGeom prst="rect">
+            <a:avLst/>
+          </a:prstGeom>
+          <a:solidFill>
+            <a:srgbClr val="FFFFFF"/>
+          </a:solidFill>
+          <a:ln>
+            <a:noFill/>
+          </a:ln>
+          <a:effectLst/>
+        </p:spPr>
+        <p:style>
+          <a:lnRef idx="1">
+            <a:schemeClr val="accent1"/>
+          </a:lnRef>
+          <a:fillRef idx="3">
+            <a:schemeClr val="accent1"/>
+          </a:fillRef>
+          <a:effectRef idx="2">
+            <a:schemeClr val="accent1"/>
+          </a:effectRef>
+          <a:fontRef idx="minor">
+            <a:schemeClr val="lt1"/>
+          </a:fontRef>
+        </p:style>
+        <p:txBody>
+          <a:bodyPr rtlCol="0" anchor="ctr"/>
+          <a:lstStyle/>
+          <a:p>
+            <a:pPr algn="ctr"/>
+          </a:p>
+        </p:txBody>
+      </p:sp>
+      <p:sp>
+        <p:nvSpPr>
+          <p:cNvPr id="22" name="TextBox 21"/>
+          <p:cNvSpPr txBox="1"/>
+          <p:nvPr/>
+        </p:nvSpPr>
+        <p:spPr>
+          <a:xfrm>
+            <a:off x="9866376" y="6976872"/>
+            <a:ext cx="4139183" cy="731520"/>
+          </a:xfrm>
+          <a:prstGeom prst="rect">
+            <a:avLst/>
+          </a:prstGeom>
+          <a:noFill/>
+        </p:spPr>
+        <p:txBody>
+          <a:bodyPr wrap="square">
+            <a:spAutoFit/>
+          </a:bodyPr>
+          <a:lstStyle/>
+          <a:p>
+            <a:pPr algn="l"/>
+            <a:r>
+              <a:rPr sz="2500">
+                <a:solidFill>
+                  <a:srgbClr val="434343"/>
+                </a:solidFill>
+                <a:latin typeface="Poppins ExtraBold"/>
+              </a:rPr>
+              <a:t>Swap the company</a:t>
+            </a:r>
+          </a:p>
+        </p:txBody>
+      </p:sp>
+      <p:sp>
+        <p:nvSpPr>
+          <p:cNvPr id="23" name="TextBox 22"/>
+          <p:cNvSpPr txBox="1"/>
+          <p:nvPr/>
+        </p:nvSpPr>
+        <p:spPr>
+          <a:xfrm>
+            <a:off x="9866376" y="7799832"/>
+            <a:ext cx="4139183" cy="1463040"/>
+          </a:xfrm>
+          <a:prstGeom prst="rect">
+            <a:avLst/>
+          </a:prstGeom>
+          <a:noFill/>
+        </p:spPr>
+        <p:txBody>
+          <a:bodyPr wrap="square">
+            <a:spAutoFit/>
+          </a:bodyPr>
+          <a:lstStyle/>
+          <a:p>
+            <a:pPr algn="l"/>
+            <a:r>
+              <a:rPr sz="1500">
+                <a:solidFill>
+                  <a:srgbClr val="434343"/>
+                </a:solidFill>
+                <a:latin typeface="Poppins"/>
+              </a:rPr>
+              <a:t>Change one line and run the same code on a different AI.</a:t>
             </a:r>
           </a:p>
         </p:txBody>

--- a/slides/Lesson 1 - Setup and Your First AI Call.pptx
+++ b/slides/Lesson 1 - Setup and Your First AI Call.pptx
@@ -8522,8 +8522,8 @@
         </p:nvSpPr>
         <p:spPr>
           <a:xfrm>
-            <a:off x="2743200" y="3474720"/>
-            <a:ext cx="10058400" cy="2194560"/>
+            <a:off x="2743200" y="3749039"/>
+            <a:ext cx="10972800" cy="2194560"/>
           </a:xfrm>
           <a:prstGeom prst="rect">
             <a:avLst/>
@@ -8569,8 +8569,8 @@
         </p:nvSpPr>
         <p:spPr>
           <a:xfrm>
-            <a:off x="2743200" y="6035040"/>
-            <a:ext cx="10058400" cy="640080"/>
+            <a:off x="2743200" y="6309360"/>
+            <a:ext cx="10972800" cy="731520"/>
           </a:xfrm>
           <a:prstGeom prst="rect">
             <a:avLst/>
@@ -8585,13 +8585,13 @@
           <a:p>
             <a:pPr algn="l"/>
             <a:r>
-              <a:rPr sz="4000">
+              <a:rPr sz="2800">
                 <a:solidFill>
                   <a:srgbClr val="666666"/>
                 </a:solidFill>
                 <a:latin typeface="Poppins Medium"/>
               </a:rPr>
-              <a:t>Level 3</a:t>
+              <a:t>8 lessons · October 2026</a:t>
             </a:r>
           </a:p>
         </p:txBody>
@@ -8778,7 +8778,7 @@
                 </a:solidFill>
                 <a:latin typeface="Poppins SemiBold"/>
               </a:rPr>
-              <a:t>Revision notes, a subject you study, the rules of a game you play, a wiki you exported. Armenian, English or both.</a:t>
+              <a:t>Revision notes, a subject you study, the rules of a game. Armenian, English or both.</a:t>
             </a:r>
           </a:p>
           <a:p>
@@ -8794,7 +8794,7 @@
                 </a:solidFill>
                 <a:latin typeface="Poppins SemiBold"/>
               </a:rPr>
-              <a:t>Shared storage is visible to everyone - bring notes on a general subject, and keep personal things out of the workshop folder.</a:t>
+              <a:t>Shared storage is visible to everyone — general subjects only, nothing personal.</a:t>
             </a:r>
           </a:p>
         </p:txBody>
@@ -10459,7 +10459,7 @@
                 </a:solidFill>
                 <a:latin typeface="Poppins Medium"/>
               </a:rPr>
-              <a:t>8 lessons · 2 hours each · you finish with a program that knows what you know</a:t>
+              <a:t>8 lessons · 2 hours each · you leave with a program that knows what you know</a:t>
             </a:r>
           </a:p>
         </p:txBody>
@@ -11735,7 +11735,7 @@
                 </a:solidFill>
                 <a:latin typeface="Poppins"/>
               </a:rPr>
-              <a:t>Ask a chatbot about your homework and it answers confidently - and sometimes invents the answer completely. It has never seen your notes.</a:t>
+              <a:t>A chatbot has never seen your notes. Ask it about your homework and it will invent an answer - confidently.</a:t>
             </a:r>
           </a:p>
           <a:p>
@@ -11751,7 +11751,7 @@
                 </a:solidFill>
                 <a:latin typeface="Poppins"/>
               </a:rPr>
-              <a:t>Over 8 lessons you will build an assistant that reads documents YOU choose, answers only from them, and names the file each answer came from.</a:t>
+              <a:t>Over 8 lessons you build an assistant that reads documents you choose, answers only from them, and names its source.</a:t>
             </a:r>
           </a:p>
           <a:p>
@@ -11767,7 +11767,7 @@
                 </a:solidFill>
                 <a:latin typeface="Poppins"/>
               </a:rPr>
-              <a:t>And when you ask something your notes do not cover, it will say so instead of guessing. Getting a computer to admit what it does not know is the hard part.</a:t>
+              <a:t>And says “that isn’t in your documents” when it isn’t. That refusal is the hard part, and the whole point.</a:t>
             </a:r>
           </a:p>
         </p:txBody>
@@ -12022,7 +12022,7 @@
                 </a:solidFill>
                 <a:latin typeface="Poppins"/>
               </a:rPr>
-              <a:t>Python, VS Code and your keys. Your work lives in your shared folder.</a:t>
+              <a:t>Python, VS Code, your keys. Work lives in your shared folder.</a:t>
             </a:r>
           </a:p>
         </p:txBody>
@@ -12180,7 +12180,7 @@
                 </a:solidFill>
                 <a:latin typeface="Poppins"/>
               </a:rPr>
-              <a:t>Send a message to Claude, and look at what actually comes back.</a:t>
+              <a:t>Send a message to Claude. Look at what comes back.</a:t>
             </a:r>
           </a:p>
         </p:txBody>
@@ -12338,7 +12338,7 @@
                 </a:solidFill>
                 <a:latin typeface="Poppins"/>
               </a:rPr>
-              <a:t>Give the model a job. One question, three different assistants.</a:t>
+              <a:t>Give the model a job. One question, three assistants.</a:t>
             </a:r>
           </a:p>
         </p:txBody>
@@ -12496,7 +12496,7 @@
                 </a:solidFill>
                 <a:latin typeface="Poppins"/>
               </a:rPr>
-              <a:t>Control length, format and language - then make it refuse.</a:t>
+              <a:t>Length, format, language - then make it refuse.</a:t>
             </a:r>
           </a:p>
         </p:txBody>
@@ -12654,7 +12654,7 @@
                 </a:solidFill>
                 <a:latin typeface="Poppins"/>
               </a:rPr>
-              <a:t>Change one line and run the same code on a different AI.</a:t>
+              <a:t>Change one line. Same code, different AI.</a:t>
             </a:r>
           </a:p>
         </p:txBody>
@@ -12825,7 +12825,7 @@
                 </a:solidFill>
                 <a:latin typeface="Poppins SemiBold"/>
               </a:rPr>
-              <a:t>Everything is already installed - you are connecting pieces, not installing them.</a:t>
+              <a:t>Everything is installed. You are connecting pieces, not installing them.</a:t>
             </a:r>
           </a:p>
           <a:p>
@@ -12841,7 +12841,7 @@
                 </a:solidFill>
                 <a:latin typeface="Poppins SemiBold"/>
               </a:rPr>
-              <a:t>Python lives on the laptop. YOUR WORK lives in your shared folder, because you may be at a different Mac next lesson.</a:t>
+              <a:t>Python lives on the laptop. Your work lives in your shared folder - you may be at a different Mac next lesson.</a:t>
             </a:r>
           </a:p>
           <a:p>
@@ -12857,7 +12857,7 @@
                 </a:solidFill>
                 <a:latin typeface="Poppins SemiBold"/>
               </a:rPr>
-              <a:t>Two keys go in your .env file: one answers questions, one searches your notes.</a:t>
+              <a:t>Two keys in .env: one answers, one searches.</a:t>
             </a:r>
           </a:p>
           <a:p>
@@ -12873,7 +12873,7 @@
                 </a:solidFill>
                 <a:latin typeface="Poppins SemiBold"/>
               </a:rPr>
-              <a:t>Pick the kernel in every notebook you open. This is the #1 source of errors all workshop.</a:t>
+              <a:t>Pick the kernel in every notebook. The #1 source of errors all workshop.</a:t>
             </a:r>
           </a:p>
         </p:txBody>
@@ -13044,7 +13044,7 @@
                 </a:solidFill>
                 <a:latin typeface="Poppins SemiBold"/>
               </a:rPr>
-              <a:t>Every message has a role. SYSTEM is written by you, the programmer, and the user never sees it. HUMAN is what the user typed.</a:t>
+              <a:t>SYSTEM - written by you, the programmer. The user never sees it.</a:t>
             </a:r>
           </a:p>
           <a:p>
@@ -13060,7 +13060,7 @@
                 </a:solidFill>
                 <a:latin typeface="Poppins SemiBold"/>
               </a:rPr>
-              <a:t>That separation is why a chatbot stays polite no matter what you type at it.</a:t>
+              <a:t>HUMAN - what the user actually typed.</a:t>
             </a:r>
           </a:p>
           <a:p>
@@ -13076,7 +13076,23 @@
                 </a:solidFill>
                 <a:latin typeface="Poppins SemiBold"/>
               </a:rPr>
-              <a:t>Same model, same question, three different system prompts - three completely different assistants.</a:t>
+              <a:t>That split is why a chatbot stays polite whatever you type at it.</a:t>
+            </a:r>
+          </a:p>
+          <a:p>
+            <a:pPr algn="l">
+              <a:spcAft>
+                <a:spcPts val="1600"/>
+              </a:spcAft>
+            </a:pPr>
+            <a:r>
+              <a:rPr sz="1800">
+                <a:solidFill>
+                  <a:srgbClr val="3627FC"/>
+                </a:solidFill>
+                <a:latin typeface="Poppins SemiBold"/>
+              </a:rPr>
+              <a:t>Same model, same question, three system prompts → three different assistants.</a:t>
             </a:r>
           </a:p>
         </p:txBody>
@@ -13164,7 +13180,7 @@
                 </a:solidFill>
                 <a:latin typeface="Poppins"/>
               </a:rPr>
-              <a:t>One paragraph of English turned a confident liar into something you can trust.</a:t>
+              <a:t>One paragraph of English. No Python. In Lesson 5, this is what makes your assistant trustworthy.</a:t>
             </a:r>
           </a:p>
         </p:txBody>

--- a/slides/Lesson 1 - Setup and Your First AI Call.pptx
+++ b/slides/Lesson 1 - Setup and Your First AI Call.pptx
@@ -8778,7 +8778,7 @@
                 </a:solidFill>
                 <a:latin typeface="Poppins SemiBold"/>
               </a:rPr>
-              <a:t>Revision notes, a subject you study, the rules of a game. Armenian, English or both.</a:t>
+              <a:t>Revision notes, a subject you study, the rules of a game. English works best.</a:t>
             </a:r>
           </a:p>
           <a:p>
@@ -12180,7 +12180,7 @@
                 </a:solidFill>
                 <a:latin typeface="Poppins"/>
               </a:rPr>
-              <a:t>Send a message to Claude. Look at what comes back.</a:t>
+              <a:t>Send a message to the AI. Look at what comes back.</a:t>
             </a:r>
           </a:p>
         </p:txBody>
